--- a/slides/CSC336-Lecture-21-Middleware.pptx
+++ b/slides/CSC336-Lecture-21-Middleware.pptx
@@ -3261,79 +3261,44 @@
       </p:sp>
       <p:sp>
         <p:nvSpPr>
-          <p:cNvPr id="6" name="Text 4"/>
-          <p:cNvSpPr txBox="1"/>
-          <p:nvPr/>
-        </p:nvSpPr>
-        <p:spPr>
-          <a:xfrm>
-            <a:off x="640080" y="6446520"/>
-            <a:ext cx="8686800" cy="292608"/>
-          </a:xfrm>
-          <a:prstGeom prst="rect">
-            <a:avLst/>
-          </a:prstGeom>
-          <a:noFill/>
-          <a:ln/>
-        </p:spPr>
-        <p:txBody>
-          <a:bodyPr wrap="square" lIns="0" tIns="0" rIns="0" bIns="0" rtlCol="0" anchor="ctr"/>
-          <a:lstStyle/>
-          <a:p>
-            <a:pPr algn="l" indent="0" marL="0">
-              <a:buNone/>
-            </a:pPr>
-            <a:r>
-              <a:rPr lang="en-US" sz="900" dirty="0">
-                <a:solidFill>
-                  <a:srgbClr val="9AA3D8"/>
-                </a:solidFill>
-                <a:latin typeface="Calibri" pitchFamily="34" charset="0"/>
-                <a:ea typeface="Calibri" pitchFamily="34" charset="-122"/>
-                <a:cs typeface="Calibri" pitchFamily="34" charset="-120"/>
-              </a:rPr>
-              <a:t>Usman Akram  •  COMSATS University Islamabad</a:t>
-            </a:r>
-            <a:endParaRPr lang="en-US" sz="900" dirty="0"/>
-          </a:p>
-        </p:txBody>
-      </p:sp>
-      <p:sp>
-        <p:nvSpPr>
-          <p:cNvPr id="7" name="Text 5"/>
-          <p:cNvSpPr txBox="1"/>
-          <p:nvPr/>
-        </p:nvSpPr>
-        <p:spPr>
-          <a:xfrm>
-            <a:off x="11155680" y="6446520"/>
-            <a:ext cx="457200" cy="292608"/>
-          </a:xfrm>
-          <a:prstGeom prst="rect">
-            <a:avLst/>
-          </a:prstGeom>
-          <a:noFill/>
-          <a:ln/>
-        </p:spPr>
-        <p:txBody>
-          <a:bodyPr wrap="square" lIns="0" tIns="0" rIns="0" bIns="0" rtlCol="0" anchor="ctr"/>
-          <a:lstStyle/>
-          <a:p>
-            <a:pPr algn="r" indent="0" marL="0">
-              <a:buNone/>
-            </a:pPr>
-            <a:r>
-              <a:rPr lang="en-US" sz="900" dirty="0">
-                <a:solidFill>
-                  <a:srgbClr val="9AA3D8"/>
-                </a:solidFill>
-                <a:latin typeface="Calibri" pitchFamily="34" charset="0"/>
-                <a:ea typeface="Calibri" pitchFamily="34" charset="-122"/>
-                <a:cs typeface="Calibri" pitchFamily="34" charset="-120"/>
-              </a:rPr>
-              <a:t>1</a:t>
-            </a:r>
-            <a:endParaRPr lang="en-US" sz="900" dirty="0"/>
+          <p:cNvPr id="8" name="cuinotes-footer-mark"/>
+          <p:cNvSpPr txBox="1"/>
+          <p:nvPr/>
+        </p:nvSpPr>
+        <p:spPr>
+          <a:xfrm>
+            <a:off x="9951720" y="6455664"/>
+            <a:ext cx="2011680" cy="292608"/>
+          </a:xfrm>
+          <a:prstGeom prst="rect">
+            <a:avLst/>
+          </a:prstGeom>
+          <a:noFill/>
+        </p:spPr>
+        <p:txBody>
+          <a:bodyPr wrap="none" lIns="0" rIns="0" tIns="0" bIns="0">
+            <a:spAutoFit/>
+          </a:bodyPr>
+          <a:lstStyle/>
+          <a:p>
+            <a:pPr algn="r"/>
+            <a:r>
+              <a:rPr sz="1000">
+                <a:solidFill>
+                  <a:srgbClr val="8A939B"/>
+                </a:solidFill>
+                <a:hlinkClick r:id="rId3"/>
+              </a:rPr>
+              <a:t>cuinotes.com</a:t>
+            </a:r>
+            <a:r>
+              <a:rPr sz="1000">
+                <a:solidFill>
+                  <a:srgbClr val="8A939B"/>
+                </a:solidFill>
+              </a:rPr>
+              <a:t>  ·  1</a:t>
+            </a:r>
           </a:p>
         </p:txBody>
       </p:sp>
@@ -3468,6 +3433,10 @@
           </a:solidFill>
           <a:ln/>
         </p:spPr>
+        <p:txBody>
+          <a:bodyPr/>
+          <a:p/>
+        </p:txBody>
       </p:sp>
       <p:sp>
         <p:nvSpPr>
@@ -3810,79 +3779,44 @@
       </p:sp>
       <p:sp>
         <p:nvSpPr>
-          <p:cNvPr id="7" name="Text 5"/>
-          <p:cNvSpPr txBox="1"/>
-          <p:nvPr/>
-        </p:nvSpPr>
-        <p:spPr>
-          <a:xfrm>
-            <a:off x="640080" y="6446520"/>
-            <a:ext cx="8686800" cy="292608"/>
-          </a:xfrm>
-          <a:prstGeom prst="rect">
-            <a:avLst/>
-          </a:prstGeom>
-          <a:noFill/>
-          <a:ln/>
-        </p:spPr>
-        <p:txBody>
-          <a:bodyPr wrap="square" lIns="0" tIns="0" rIns="0" bIns="0" rtlCol="0" anchor="ctr"/>
-          <a:lstStyle/>
-          <a:p>
-            <a:pPr algn="l" indent="0" marL="0">
-              <a:buNone/>
-            </a:pPr>
-            <a:r>
-              <a:rPr lang="en-US" sz="900" dirty="0">
-                <a:solidFill>
-                  <a:srgbClr val="5D5D72"/>
-                </a:solidFill>
-                <a:latin typeface="Calibri" pitchFamily="34" charset="0"/>
-                <a:ea typeface="Calibri" pitchFamily="34" charset="-122"/>
-                <a:cs typeface="Calibri" pitchFamily="34" charset="-120"/>
-              </a:rPr>
-              <a:t>Usman Akram  •  COMSATS University Islamabad</a:t>
-            </a:r>
-            <a:endParaRPr lang="en-US" sz="900" dirty="0"/>
-          </a:p>
-        </p:txBody>
-      </p:sp>
-      <p:sp>
-        <p:nvSpPr>
-          <p:cNvPr id="8" name="Text 6"/>
-          <p:cNvSpPr txBox="1"/>
-          <p:nvPr/>
-        </p:nvSpPr>
-        <p:spPr>
-          <a:xfrm>
-            <a:off x="11155680" y="6446520"/>
-            <a:ext cx="457200" cy="292608"/>
-          </a:xfrm>
-          <a:prstGeom prst="rect">
-            <a:avLst/>
-          </a:prstGeom>
-          <a:noFill/>
-          <a:ln/>
-        </p:spPr>
-        <p:txBody>
-          <a:bodyPr wrap="square" lIns="0" tIns="0" rIns="0" bIns="0" rtlCol="0" anchor="ctr"/>
-          <a:lstStyle/>
-          <a:p>
-            <a:pPr algn="r" indent="0" marL="0">
-              <a:buNone/>
-            </a:pPr>
-            <a:r>
-              <a:rPr lang="en-US" sz="900" dirty="0">
-                <a:solidFill>
-                  <a:srgbClr val="5D5D72"/>
-                </a:solidFill>
-                <a:latin typeface="Calibri" pitchFamily="34" charset="0"/>
-                <a:ea typeface="Calibri" pitchFamily="34" charset="-122"/>
-                <a:cs typeface="Calibri" pitchFamily="34" charset="-120"/>
-              </a:rPr>
-              <a:t>10</a:t>
-            </a:r>
-            <a:endParaRPr lang="en-US" sz="900" dirty="0"/>
+          <p:cNvPr id="9" name="cuinotes-footer-mark"/>
+          <p:cNvSpPr txBox="1"/>
+          <p:nvPr/>
+        </p:nvSpPr>
+        <p:spPr>
+          <a:xfrm>
+            <a:off x="9951720" y="6455664"/>
+            <a:ext cx="2011680" cy="292608"/>
+          </a:xfrm>
+          <a:prstGeom prst="rect">
+            <a:avLst/>
+          </a:prstGeom>
+          <a:noFill/>
+        </p:spPr>
+        <p:txBody>
+          <a:bodyPr wrap="none" lIns="0" rIns="0" tIns="0" bIns="0">
+            <a:spAutoFit/>
+          </a:bodyPr>
+          <a:lstStyle/>
+          <a:p>
+            <a:pPr algn="r"/>
+            <a:r>
+              <a:rPr sz="1000">
+                <a:solidFill>
+                  <a:srgbClr val="8A939B"/>
+                </a:solidFill>
+                <a:hlinkClick r:id="rId3"/>
+              </a:rPr>
+              <a:t>cuinotes.com</a:t>
+            </a:r>
+            <a:r>
+              <a:rPr sz="1000">
+                <a:solidFill>
+                  <a:srgbClr val="8A939B"/>
+                </a:solidFill>
+              </a:rPr>
+              <a:t>  ·  10</a:t>
+            </a:r>
           </a:p>
         </p:txBody>
       </p:sp>
@@ -4017,6 +3951,10 @@
           </a:solidFill>
           <a:ln/>
         </p:spPr>
+        <p:txBody>
+          <a:bodyPr/>
+          <a:p/>
+        </p:txBody>
       </p:sp>
       <p:sp>
         <p:nvSpPr>
@@ -4338,79 +4276,44 @@
       </p:sp>
       <p:sp>
         <p:nvSpPr>
-          <p:cNvPr id="6" name="Text 4"/>
-          <p:cNvSpPr txBox="1"/>
-          <p:nvPr/>
-        </p:nvSpPr>
-        <p:spPr>
-          <a:xfrm>
-            <a:off x="640080" y="6446520"/>
-            <a:ext cx="8686800" cy="292608"/>
-          </a:xfrm>
-          <a:prstGeom prst="rect">
-            <a:avLst/>
-          </a:prstGeom>
-          <a:noFill/>
-          <a:ln/>
-        </p:spPr>
-        <p:txBody>
-          <a:bodyPr wrap="square" lIns="0" tIns="0" rIns="0" bIns="0" rtlCol="0" anchor="ctr"/>
-          <a:lstStyle/>
-          <a:p>
-            <a:pPr algn="l" indent="0" marL="0">
-              <a:buNone/>
-            </a:pPr>
-            <a:r>
-              <a:rPr lang="en-US" sz="900" dirty="0">
-                <a:solidFill>
-                  <a:srgbClr val="5D5D72"/>
-                </a:solidFill>
-                <a:latin typeface="Calibri" pitchFamily="34" charset="0"/>
-                <a:ea typeface="Calibri" pitchFamily="34" charset="-122"/>
-                <a:cs typeface="Calibri" pitchFamily="34" charset="-120"/>
-              </a:rPr>
-              <a:t>Usman Akram  •  COMSATS University Islamabad</a:t>
-            </a:r>
-            <a:endParaRPr lang="en-US" sz="900" dirty="0"/>
-          </a:p>
-        </p:txBody>
-      </p:sp>
-      <p:sp>
-        <p:nvSpPr>
-          <p:cNvPr id="7" name="Text 5"/>
-          <p:cNvSpPr txBox="1"/>
-          <p:nvPr/>
-        </p:nvSpPr>
-        <p:spPr>
-          <a:xfrm>
-            <a:off x="11155680" y="6446520"/>
-            <a:ext cx="457200" cy="292608"/>
-          </a:xfrm>
-          <a:prstGeom prst="rect">
-            <a:avLst/>
-          </a:prstGeom>
-          <a:noFill/>
-          <a:ln/>
-        </p:spPr>
-        <p:txBody>
-          <a:bodyPr wrap="square" lIns="0" tIns="0" rIns="0" bIns="0" rtlCol="0" anchor="ctr"/>
-          <a:lstStyle/>
-          <a:p>
-            <a:pPr algn="r" indent="0" marL="0">
-              <a:buNone/>
-            </a:pPr>
-            <a:r>
-              <a:rPr lang="en-US" sz="900" dirty="0">
-                <a:solidFill>
-                  <a:srgbClr val="5D5D72"/>
-                </a:solidFill>
-                <a:latin typeface="Calibri" pitchFamily="34" charset="0"/>
-                <a:ea typeface="Calibri" pitchFamily="34" charset="-122"/>
-                <a:cs typeface="Calibri" pitchFamily="34" charset="-120"/>
-              </a:rPr>
-              <a:t>11</a:t>
-            </a:r>
-            <a:endParaRPr lang="en-US" sz="900" dirty="0"/>
+          <p:cNvPr id="8" name="cuinotes-footer-mark"/>
+          <p:cNvSpPr txBox="1"/>
+          <p:nvPr/>
+        </p:nvSpPr>
+        <p:spPr>
+          <a:xfrm>
+            <a:off x="9951720" y="6455664"/>
+            <a:ext cx="2011680" cy="292608"/>
+          </a:xfrm>
+          <a:prstGeom prst="rect">
+            <a:avLst/>
+          </a:prstGeom>
+          <a:noFill/>
+        </p:spPr>
+        <p:txBody>
+          <a:bodyPr wrap="none" lIns="0" rIns="0" tIns="0" bIns="0">
+            <a:spAutoFit/>
+          </a:bodyPr>
+          <a:lstStyle/>
+          <a:p>
+            <a:pPr algn="r"/>
+            <a:r>
+              <a:rPr sz="1000">
+                <a:solidFill>
+                  <a:srgbClr val="8A939B"/>
+                </a:solidFill>
+                <a:hlinkClick r:id="rId3"/>
+              </a:rPr>
+              <a:t>cuinotes.com</a:t>
+            </a:r>
+            <a:r>
+              <a:rPr sz="1000">
+                <a:solidFill>
+                  <a:srgbClr val="8A939B"/>
+                </a:solidFill>
+              </a:rPr>
+              <a:t>  ·  11</a:t>
+            </a:r>
           </a:p>
         </p:txBody>
       </p:sp>
@@ -4545,6 +4448,10 @@
           </a:solidFill>
           <a:ln/>
         </p:spPr>
+        <p:txBody>
+          <a:bodyPr/>
+          <a:p/>
+        </p:txBody>
       </p:sp>
       <p:sp>
         <p:nvSpPr>
@@ -4669,79 +4576,44 @@
       </p:sp>
       <p:sp>
         <p:nvSpPr>
-          <p:cNvPr id="7" name="Text 5"/>
-          <p:cNvSpPr txBox="1"/>
-          <p:nvPr/>
-        </p:nvSpPr>
-        <p:spPr>
-          <a:xfrm>
-            <a:off x="640080" y="6446520"/>
-            <a:ext cx="8686800" cy="292608"/>
-          </a:xfrm>
-          <a:prstGeom prst="rect">
-            <a:avLst/>
-          </a:prstGeom>
-          <a:noFill/>
-          <a:ln/>
-        </p:spPr>
-        <p:txBody>
-          <a:bodyPr wrap="square" lIns="0" tIns="0" rIns="0" bIns="0" rtlCol="0" anchor="ctr"/>
-          <a:lstStyle/>
-          <a:p>
-            <a:pPr algn="l" indent="0" marL="0">
-              <a:buNone/>
-            </a:pPr>
-            <a:r>
-              <a:rPr lang="en-US" sz="900" dirty="0">
-                <a:solidFill>
-                  <a:srgbClr val="5D5D72"/>
-                </a:solidFill>
-                <a:latin typeface="Calibri" pitchFamily="34" charset="0"/>
-                <a:ea typeface="Calibri" pitchFamily="34" charset="-122"/>
-                <a:cs typeface="Calibri" pitchFamily="34" charset="-120"/>
-              </a:rPr>
-              <a:t>Usman Akram  •  COMSATS University Islamabad</a:t>
-            </a:r>
-            <a:endParaRPr lang="en-US" sz="900" dirty="0"/>
-          </a:p>
-        </p:txBody>
-      </p:sp>
-      <p:sp>
-        <p:nvSpPr>
-          <p:cNvPr id="8" name="Text 6"/>
-          <p:cNvSpPr txBox="1"/>
-          <p:nvPr/>
-        </p:nvSpPr>
-        <p:spPr>
-          <a:xfrm>
-            <a:off x="11155680" y="6446520"/>
-            <a:ext cx="457200" cy="292608"/>
-          </a:xfrm>
-          <a:prstGeom prst="rect">
-            <a:avLst/>
-          </a:prstGeom>
-          <a:noFill/>
-          <a:ln/>
-        </p:spPr>
-        <p:txBody>
-          <a:bodyPr wrap="square" lIns="0" tIns="0" rIns="0" bIns="0" rtlCol="0" anchor="ctr"/>
-          <a:lstStyle/>
-          <a:p>
-            <a:pPr algn="r" indent="0" marL="0">
-              <a:buNone/>
-            </a:pPr>
-            <a:r>
-              <a:rPr lang="en-US" sz="900" dirty="0">
-                <a:solidFill>
-                  <a:srgbClr val="5D5D72"/>
-                </a:solidFill>
-                <a:latin typeface="Calibri" pitchFamily="34" charset="0"/>
-                <a:ea typeface="Calibri" pitchFamily="34" charset="-122"/>
-                <a:cs typeface="Calibri" pitchFamily="34" charset="-120"/>
-              </a:rPr>
-              <a:t>12</a:t>
-            </a:r>
-            <a:endParaRPr lang="en-US" sz="900" dirty="0"/>
+          <p:cNvPr id="9" name="cuinotes-footer-mark"/>
+          <p:cNvSpPr txBox="1"/>
+          <p:nvPr/>
+        </p:nvSpPr>
+        <p:spPr>
+          <a:xfrm>
+            <a:off x="9951720" y="6455664"/>
+            <a:ext cx="2011680" cy="292608"/>
+          </a:xfrm>
+          <a:prstGeom prst="rect">
+            <a:avLst/>
+          </a:prstGeom>
+          <a:noFill/>
+        </p:spPr>
+        <p:txBody>
+          <a:bodyPr wrap="none" lIns="0" rIns="0" tIns="0" bIns="0">
+            <a:spAutoFit/>
+          </a:bodyPr>
+          <a:lstStyle/>
+          <a:p>
+            <a:pPr algn="r"/>
+            <a:r>
+              <a:rPr sz="1000">
+                <a:solidFill>
+                  <a:srgbClr val="8A939B"/>
+                </a:solidFill>
+                <a:hlinkClick r:id="rId3"/>
+              </a:rPr>
+              <a:t>cuinotes.com</a:t>
+            </a:r>
+            <a:r>
+              <a:rPr sz="1000">
+                <a:solidFill>
+                  <a:srgbClr val="8A939B"/>
+                </a:solidFill>
+              </a:rPr>
+              <a:t>  ·  12</a:t>
+            </a:r>
           </a:p>
         </p:txBody>
       </p:sp>
@@ -4874,6 +4746,10 @@
           </a:solidFill>
           <a:ln/>
         </p:spPr>
+        <p:txBody>
+          <a:bodyPr/>
+          <a:p/>
+        </p:txBody>
       </p:sp>
       <p:sp>
         <p:nvSpPr>
@@ -4972,6 +4848,10 @@
           </a:solidFill>
           <a:ln/>
         </p:spPr>
+        <p:txBody>
+          <a:bodyPr/>
+          <a:p/>
+        </p:txBody>
       </p:sp>
       <p:sp>
         <p:nvSpPr>
@@ -5070,6 +4950,10 @@
           </a:solidFill>
           <a:ln/>
         </p:spPr>
+        <p:txBody>
+          <a:bodyPr/>
+          <a:p/>
+        </p:txBody>
       </p:sp>
       <p:sp>
         <p:nvSpPr>
@@ -5151,79 +5035,44 @@
       </p:sp>
       <p:sp>
         <p:nvSpPr>
-          <p:cNvPr id="13" name="Text 11"/>
-          <p:cNvSpPr txBox="1"/>
-          <p:nvPr/>
-        </p:nvSpPr>
-        <p:spPr>
-          <a:xfrm>
-            <a:off x="640080" y="6446520"/>
-            <a:ext cx="8686800" cy="292608"/>
-          </a:xfrm>
-          <a:prstGeom prst="rect">
-            <a:avLst/>
-          </a:prstGeom>
-          <a:noFill/>
-          <a:ln/>
-        </p:spPr>
-        <p:txBody>
-          <a:bodyPr wrap="square" lIns="0" tIns="0" rIns="0" bIns="0" rtlCol="0" anchor="ctr"/>
-          <a:lstStyle/>
-          <a:p>
-            <a:pPr algn="l" indent="0" marL="0">
-              <a:buNone/>
-            </a:pPr>
-            <a:r>
-              <a:rPr lang="en-US" sz="900" dirty="0">
-                <a:solidFill>
-                  <a:srgbClr val="5D5D72"/>
-                </a:solidFill>
-                <a:latin typeface="Calibri" pitchFamily="34" charset="0"/>
-                <a:ea typeface="Calibri" pitchFamily="34" charset="-122"/>
-                <a:cs typeface="Calibri" pitchFamily="34" charset="-120"/>
-              </a:rPr>
-              <a:t>Usman Akram  •  COMSATS University Islamabad</a:t>
-            </a:r>
-            <a:endParaRPr lang="en-US" sz="900" dirty="0"/>
-          </a:p>
-        </p:txBody>
-      </p:sp>
-      <p:sp>
-        <p:nvSpPr>
-          <p:cNvPr id="14" name="Text 12"/>
-          <p:cNvSpPr txBox="1"/>
-          <p:nvPr/>
-        </p:nvSpPr>
-        <p:spPr>
-          <a:xfrm>
-            <a:off x="11155680" y="6446520"/>
-            <a:ext cx="457200" cy="292608"/>
-          </a:xfrm>
-          <a:prstGeom prst="rect">
-            <a:avLst/>
-          </a:prstGeom>
-          <a:noFill/>
-          <a:ln/>
-        </p:spPr>
-        <p:txBody>
-          <a:bodyPr wrap="square" lIns="0" tIns="0" rIns="0" bIns="0" rtlCol="0" anchor="ctr"/>
-          <a:lstStyle/>
-          <a:p>
-            <a:pPr algn="r" indent="0" marL="0">
-              <a:buNone/>
-            </a:pPr>
-            <a:r>
-              <a:rPr lang="en-US" sz="900" dirty="0">
-                <a:solidFill>
-                  <a:srgbClr val="5D5D72"/>
-                </a:solidFill>
-                <a:latin typeface="Calibri" pitchFamily="34" charset="0"/>
-                <a:ea typeface="Calibri" pitchFamily="34" charset="-122"/>
-                <a:cs typeface="Calibri" pitchFamily="34" charset="-120"/>
-              </a:rPr>
-              <a:t>13</a:t>
-            </a:r>
-            <a:endParaRPr lang="en-US" sz="900" dirty="0"/>
+          <p:cNvPr id="15" name="cuinotes-footer-mark"/>
+          <p:cNvSpPr txBox="1"/>
+          <p:nvPr/>
+        </p:nvSpPr>
+        <p:spPr>
+          <a:xfrm>
+            <a:off x="9951720" y="6455664"/>
+            <a:ext cx="2011680" cy="292608"/>
+          </a:xfrm>
+          <a:prstGeom prst="rect">
+            <a:avLst/>
+          </a:prstGeom>
+          <a:noFill/>
+        </p:spPr>
+        <p:txBody>
+          <a:bodyPr wrap="none" lIns="0" rIns="0" tIns="0" bIns="0">
+            <a:spAutoFit/>
+          </a:bodyPr>
+          <a:lstStyle/>
+          <a:p>
+            <a:pPr algn="r"/>
+            <a:r>
+              <a:rPr sz="1000">
+                <a:solidFill>
+                  <a:srgbClr val="8A939B"/>
+                </a:solidFill>
+                <a:hlinkClick r:id="rId3"/>
+              </a:rPr>
+              <a:t>cuinotes.com</a:t>
+            </a:r>
+            <a:r>
+              <a:rPr sz="1000">
+                <a:solidFill>
+                  <a:srgbClr val="8A939B"/>
+                </a:solidFill>
+              </a:rPr>
+              <a:t>  ·  13</a:t>
+            </a:r>
           </a:p>
         </p:txBody>
       </p:sp>
@@ -5358,6 +5207,10 @@
           </a:solidFill>
           <a:ln/>
         </p:spPr>
+        <p:txBody>
+          <a:bodyPr/>
+          <a:p/>
+        </p:txBody>
       </p:sp>
       <p:sp>
         <p:nvSpPr>
@@ -5542,79 +5395,44 @@
       </p:sp>
       <p:sp>
         <p:nvSpPr>
-          <p:cNvPr id="7" name="Text 5"/>
-          <p:cNvSpPr txBox="1"/>
-          <p:nvPr/>
-        </p:nvSpPr>
-        <p:spPr>
-          <a:xfrm>
-            <a:off x="640080" y="6446520"/>
-            <a:ext cx="8686800" cy="292608"/>
-          </a:xfrm>
-          <a:prstGeom prst="rect">
-            <a:avLst/>
-          </a:prstGeom>
-          <a:noFill/>
-          <a:ln/>
-        </p:spPr>
-        <p:txBody>
-          <a:bodyPr wrap="square" lIns="0" tIns="0" rIns="0" bIns="0" rtlCol="0" anchor="ctr"/>
-          <a:lstStyle/>
-          <a:p>
-            <a:pPr algn="l" indent="0" marL="0">
-              <a:buNone/>
-            </a:pPr>
-            <a:r>
-              <a:rPr lang="en-US" sz="900" dirty="0">
-                <a:solidFill>
-                  <a:srgbClr val="5D5D72"/>
-                </a:solidFill>
-                <a:latin typeface="Calibri" pitchFamily="34" charset="0"/>
-                <a:ea typeface="Calibri" pitchFamily="34" charset="-122"/>
-                <a:cs typeface="Calibri" pitchFamily="34" charset="-120"/>
-              </a:rPr>
-              <a:t>Usman Akram  •  COMSATS University Islamabad</a:t>
-            </a:r>
-            <a:endParaRPr lang="en-US" sz="900" dirty="0"/>
-          </a:p>
-        </p:txBody>
-      </p:sp>
-      <p:sp>
-        <p:nvSpPr>
-          <p:cNvPr id="8" name="Text 6"/>
-          <p:cNvSpPr txBox="1"/>
-          <p:nvPr/>
-        </p:nvSpPr>
-        <p:spPr>
-          <a:xfrm>
-            <a:off x="11155680" y="6446520"/>
-            <a:ext cx="457200" cy="292608"/>
-          </a:xfrm>
-          <a:prstGeom prst="rect">
-            <a:avLst/>
-          </a:prstGeom>
-          <a:noFill/>
-          <a:ln/>
-        </p:spPr>
-        <p:txBody>
-          <a:bodyPr wrap="square" lIns="0" tIns="0" rIns="0" bIns="0" rtlCol="0" anchor="ctr"/>
-          <a:lstStyle/>
-          <a:p>
-            <a:pPr algn="r" indent="0" marL="0">
-              <a:buNone/>
-            </a:pPr>
-            <a:r>
-              <a:rPr lang="en-US" sz="900" dirty="0">
-                <a:solidFill>
-                  <a:srgbClr val="5D5D72"/>
-                </a:solidFill>
-                <a:latin typeface="Calibri" pitchFamily="34" charset="0"/>
-                <a:ea typeface="Calibri" pitchFamily="34" charset="-122"/>
-                <a:cs typeface="Calibri" pitchFamily="34" charset="-120"/>
-              </a:rPr>
-              <a:t>14</a:t>
-            </a:r>
-            <a:endParaRPr lang="en-US" sz="900" dirty="0"/>
+          <p:cNvPr id="9" name="cuinotes-footer-mark"/>
+          <p:cNvSpPr txBox="1"/>
+          <p:nvPr/>
+        </p:nvSpPr>
+        <p:spPr>
+          <a:xfrm>
+            <a:off x="9951720" y="6455664"/>
+            <a:ext cx="2011680" cy="292608"/>
+          </a:xfrm>
+          <a:prstGeom prst="rect">
+            <a:avLst/>
+          </a:prstGeom>
+          <a:noFill/>
+        </p:spPr>
+        <p:txBody>
+          <a:bodyPr wrap="none" lIns="0" rIns="0" tIns="0" bIns="0">
+            <a:spAutoFit/>
+          </a:bodyPr>
+          <a:lstStyle/>
+          <a:p>
+            <a:pPr algn="r"/>
+            <a:r>
+              <a:rPr sz="1000">
+                <a:solidFill>
+                  <a:srgbClr val="8A939B"/>
+                </a:solidFill>
+                <a:hlinkClick r:id="rId3"/>
+              </a:rPr>
+              <a:t>cuinotes.com</a:t>
+            </a:r>
+            <a:r>
+              <a:rPr sz="1000">
+                <a:solidFill>
+                  <a:srgbClr val="8A939B"/>
+                </a:solidFill>
+              </a:rPr>
+              <a:t>  ·  14</a:t>
+            </a:r>
           </a:p>
         </p:txBody>
       </p:sp>
@@ -5749,6 +5567,10 @@
           </a:solidFill>
           <a:ln/>
         </p:spPr>
+        <p:txBody>
+          <a:bodyPr/>
+          <a:p/>
+        </p:txBody>
       </p:sp>
       <p:sp>
         <p:nvSpPr>
@@ -6091,79 +5913,44 @@
       </p:sp>
       <p:sp>
         <p:nvSpPr>
-          <p:cNvPr id="7" name="Text 5"/>
-          <p:cNvSpPr txBox="1"/>
-          <p:nvPr/>
-        </p:nvSpPr>
-        <p:spPr>
-          <a:xfrm>
-            <a:off x="640080" y="6446520"/>
-            <a:ext cx="8686800" cy="292608"/>
-          </a:xfrm>
-          <a:prstGeom prst="rect">
-            <a:avLst/>
-          </a:prstGeom>
-          <a:noFill/>
-          <a:ln/>
-        </p:spPr>
-        <p:txBody>
-          <a:bodyPr wrap="square" lIns="0" tIns="0" rIns="0" bIns="0" rtlCol="0" anchor="ctr"/>
-          <a:lstStyle/>
-          <a:p>
-            <a:pPr algn="l" indent="0" marL="0">
-              <a:buNone/>
-            </a:pPr>
-            <a:r>
-              <a:rPr lang="en-US" sz="900" dirty="0">
-                <a:solidFill>
-                  <a:srgbClr val="5D5D72"/>
-                </a:solidFill>
-                <a:latin typeface="Calibri" pitchFamily="34" charset="0"/>
-                <a:ea typeface="Calibri" pitchFamily="34" charset="-122"/>
-                <a:cs typeface="Calibri" pitchFamily="34" charset="-120"/>
-              </a:rPr>
-              <a:t>Usman Akram  •  COMSATS University Islamabad</a:t>
-            </a:r>
-            <a:endParaRPr lang="en-US" sz="900" dirty="0"/>
-          </a:p>
-        </p:txBody>
-      </p:sp>
-      <p:sp>
-        <p:nvSpPr>
-          <p:cNvPr id="8" name="Text 6"/>
-          <p:cNvSpPr txBox="1"/>
-          <p:nvPr/>
-        </p:nvSpPr>
-        <p:spPr>
-          <a:xfrm>
-            <a:off x="11155680" y="6446520"/>
-            <a:ext cx="457200" cy="292608"/>
-          </a:xfrm>
-          <a:prstGeom prst="rect">
-            <a:avLst/>
-          </a:prstGeom>
-          <a:noFill/>
-          <a:ln/>
-        </p:spPr>
-        <p:txBody>
-          <a:bodyPr wrap="square" lIns="0" tIns="0" rIns="0" bIns="0" rtlCol="0" anchor="ctr"/>
-          <a:lstStyle/>
-          <a:p>
-            <a:pPr algn="r" indent="0" marL="0">
-              <a:buNone/>
-            </a:pPr>
-            <a:r>
-              <a:rPr lang="en-US" sz="900" dirty="0">
-                <a:solidFill>
-                  <a:srgbClr val="5D5D72"/>
-                </a:solidFill>
-                <a:latin typeface="Calibri" pitchFamily="34" charset="0"/>
-                <a:ea typeface="Calibri" pitchFamily="34" charset="-122"/>
-                <a:cs typeface="Calibri" pitchFamily="34" charset="-120"/>
-              </a:rPr>
-              <a:t>15</a:t>
-            </a:r>
-            <a:endParaRPr lang="en-US" sz="900" dirty="0"/>
+          <p:cNvPr id="9" name="cuinotes-footer-mark"/>
+          <p:cNvSpPr txBox="1"/>
+          <p:nvPr/>
+        </p:nvSpPr>
+        <p:spPr>
+          <a:xfrm>
+            <a:off x="9951720" y="6455664"/>
+            <a:ext cx="2011680" cy="292608"/>
+          </a:xfrm>
+          <a:prstGeom prst="rect">
+            <a:avLst/>
+          </a:prstGeom>
+          <a:noFill/>
+        </p:spPr>
+        <p:txBody>
+          <a:bodyPr wrap="none" lIns="0" rIns="0" tIns="0" bIns="0">
+            <a:spAutoFit/>
+          </a:bodyPr>
+          <a:lstStyle/>
+          <a:p>
+            <a:pPr algn="r"/>
+            <a:r>
+              <a:rPr sz="1000">
+                <a:solidFill>
+                  <a:srgbClr val="8A939B"/>
+                </a:solidFill>
+                <a:hlinkClick r:id="rId3"/>
+              </a:rPr>
+              <a:t>cuinotes.com</a:t>
+            </a:r>
+            <a:r>
+              <a:rPr sz="1000">
+                <a:solidFill>
+                  <a:srgbClr val="8A939B"/>
+                </a:solidFill>
+              </a:rPr>
+              <a:t>  ·  15</a:t>
+            </a:r>
           </a:p>
         </p:txBody>
       </p:sp>
@@ -6303,6 +6090,10 @@
             <a:prstDash val="solid"/>
           </a:ln>
         </p:spPr>
+        <p:txBody>
+          <a:bodyPr/>
+          <a:p/>
+        </p:txBody>
       </p:sp>
       <p:sp>
         <p:nvSpPr>
@@ -6384,79 +6175,44 @@
       </p:sp>
       <p:sp>
         <p:nvSpPr>
-          <p:cNvPr id="7" name="Text 5"/>
-          <p:cNvSpPr txBox="1"/>
-          <p:nvPr/>
-        </p:nvSpPr>
-        <p:spPr>
-          <a:xfrm>
-            <a:off x="640080" y="6446520"/>
-            <a:ext cx="8686800" cy="292608"/>
-          </a:xfrm>
-          <a:prstGeom prst="rect">
-            <a:avLst/>
-          </a:prstGeom>
-          <a:noFill/>
-          <a:ln/>
-        </p:spPr>
-        <p:txBody>
-          <a:bodyPr wrap="square" lIns="0" tIns="0" rIns="0" bIns="0" rtlCol="0" anchor="ctr"/>
-          <a:lstStyle/>
-          <a:p>
-            <a:pPr algn="l" indent="0" marL="0">
-              <a:buNone/>
-            </a:pPr>
-            <a:r>
-              <a:rPr lang="en-US" sz="900" dirty="0">
-                <a:solidFill>
-                  <a:srgbClr val="5D5D72"/>
-                </a:solidFill>
-                <a:latin typeface="Calibri" pitchFamily="34" charset="0"/>
-                <a:ea typeface="Calibri" pitchFamily="34" charset="-122"/>
-                <a:cs typeface="Calibri" pitchFamily="34" charset="-120"/>
-              </a:rPr>
-              <a:t>Usman Akram  •  COMSATS University Islamabad</a:t>
-            </a:r>
-            <a:endParaRPr lang="en-US" sz="900" dirty="0"/>
-          </a:p>
-        </p:txBody>
-      </p:sp>
-      <p:sp>
-        <p:nvSpPr>
-          <p:cNvPr id="8" name="Text 6"/>
-          <p:cNvSpPr txBox="1"/>
-          <p:nvPr/>
-        </p:nvSpPr>
-        <p:spPr>
-          <a:xfrm>
-            <a:off x="11155680" y="6446520"/>
-            <a:ext cx="457200" cy="292608"/>
-          </a:xfrm>
-          <a:prstGeom prst="rect">
-            <a:avLst/>
-          </a:prstGeom>
-          <a:noFill/>
-          <a:ln/>
-        </p:spPr>
-        <p:txBody>
-          <a:bodyPr wrap="square" lIns="0" tIns="0" rIns="0" bIns="0" rtlCol="0" anchor="ctr"/>
-          <a:lstStyle/>
-          <a:p>
-            <a:pPr algn="r" indent="0" marL="0">
-              <a:buNone/>
-            </a:pPr>
-            <a:r>
-              <a:rPr lang="en-US" sz="900" dirty="0">
-                <a:solidFill>
-                  <a:srgbClr val="5D5D72"/>
-                </a:solidFill>
-                <a:latin typeface="Calibri" pitchFamily="34" charset="0"/>
-                <a:ea typeface="Calibri" pitchFamily="34" charset="-122"/>
-                <a:cs typeface="Calibri" pitchFamily="34" charset="-120"/>
-              </a:rPr>
-              <a:t>16</a:t>
-            </a:r>
-            <a:endParaRPr lang="en-US" sz="900" dirty="0"/>
+          <p:cNvPr id="9" name="cuinotes-footer-mark"/>
+          <p:cNvSpPr txBox="1"/>
+          <p:nvPr/>
+        </p:nvSpPr>
+        <p:spPr>
+          <a:xfrm>
+            <a:off x="9951720" y="6455664"/>
+            <a:ext cx="2011680" cy="292608"/>
+          </a:xfrm>
+          <a:prstGeom prst="rect">
+            <a:avLst/>
+          </a:prstGeom>
+          <a:noFill/>
+        </p:spPr>
+        <p:txBody>
+          <a:bodyPr wrap="none" lIns="0" rIns="0" tIns="0" bIns="0">
+            <a:spAutoFit/>
+          </a:bodyPr>
+          <a:lstStyle/>
+          <a:p>
+            <a:pPr algn="r"/>
+            <a:r>
+              <a:rPr sz="1000">
+                <a:solidFill>
+                  <a:srgbClr val="8A939B"/>
+                </a:solidFill>
+                <a:hlinkClick r:id="rId3"/>
+              </a:rPr>
+              <a:t>cuinotes.com</a:t>
+            </a:r>
+            <a:r>
+              <a:rPr sz="1000">
+                <a:solidFill>
+                  <a:srgbClr val="8A939B"/>
+                </a:solidFill>
+              </a:rPr>
+              <a:t>  ·  16</a:t>
+            </a:r>
           </a:p>
         </p:txBody>
       </p:sp>
@@ -6589,6 +6345,10 @@
           </a:solidFill>
           <a:ln/>
         </p:spPr>
+        <p:txBody>
+          <a:bodyPr/>
+          <a:p/>
+        </p:txBody>
       </p:sp>
       <p:sp>
         <p:nvSpPr>
@@ -6687,6 +6447,10 @@
           </a:solidFill>
           <a:ln/>
         </p:spPr>
+        <p:txBody>
+          <a:bodyPr/>
+          <a:p/>
+        </p:txBody>
       </p:sp>
       <p:sp>
         <p:nvSpPr>
@@ -6785,6 +6549,10 @@
           </a:solidFill>
           <a:ln/>
         </p:spPr>
+        <p:txBody>
+          <a:bodyPr/>
+          <a:p/>
+        </p:txBody>
       </p:sp>
       <p:sp>
         <p:nvSpPr>
@@ -6866,79 +6634,44 @@
       </p:sp>
       <p:sp>
         <p:nvSpPr>
-          <p:cNvPr id="13" name="Text 11"/>
-          <p:cNvSpPr txBox="1"/>
-          <p:nvPr/>
-        </p:nvSpPr>
-        <p:spPr>
-          <a:xfrm>
-            <a:off x="640080" y="6446520"/>
-            <a:ext cx="8686800" cy="292608"/>
-          </a:xfrm>
-          <a:prstGeom prst="rect">
-            <a:avLst/>
-          </a:prstGeom>
-          <a:noFill/>
-          <a:ln/>
-        </p:spPr>
-        <p:txBody>
-          <a:bodyPr wrap="square" lIns="0" tIns="0" rIns="0" bIns="0" rtlCol="0" anchor="ctr"/>
-          <a:lstStyle/>
-          <a:p>
-            <a:pPr algn="l" indent="0" marL="0">
-              <a:buNone/>
-            </a:pPr>
-            <a:r>
-              <a:rPr lang="en-US" sz="900" dirty="0">
-                <a:solidFill>
-                  <a:srgbClr val="5D5D72"/>
-                </a:solidFill>
-                <a:latin typeface="Calibri" pitchFamily="34" charset="0"/>
-                <a:ea typeface="Calibri" pitchFamily="34" charset="-122"/>
-                <a:cs typeface="Calibri" pitchFamily="34" charset="-120"/>
-              </a:rPr>
-              <a:t>Usman Akram  •  COMSATS University Islamabad</a:t>
-            </a:r>
-            <a:endParaRPr lang="en-US" sz="900" dirty="0"/>
-          </a:p>
-        </p:txBody>
-      </p:sp>
-      <p:sp>
-        <p:nvSpPr>
-          <p:cNvPr id="14" name="Text 12"/>
-          <p:cNvSpPr txBox="1"/>
-          <p:nvPr/>
-        </p:nvSpPr>
-        <p:spPr>
-          <a:xfrm>
-            <a:off x="11155680" y="6446520"/>
-            <a:ext cx="457200" cy="292608"/>
-          </a:xfrm>
-          <a:prstGeom prst="rect">
-            <a:avLst/>
-          </a:prstGeom>
-          <a:noFill/>
-          <a:ln/>
-        </p:spPr>
-        <p:txBody>
-          <a:bodyPr wrap="square" lIns="0" tIns="0" rIns="0" bIns="0" rtlCol="0" anchor="ctr"/>
-          <a:lstStyle/>
-          <a:p>
-            <a:pPr algn="r" indent="0" marL="0">
-              <a:buNone/>
-            </a:pPr>
-            <a:r>
-              <a:rPr lang="en-US" sz="900" dirty="0">
-                <a:solidFill>
-                  <a:srgbClr val="5D5D72"/>
-                </a:solidFill>
-                <a:latin typeface="Calibri" pitchFamily="34" charset="0"/>
-                <a:ea typeface="Calibri" pitchFamily="34" charset="-122"/>
-                <a:cs typeface="Calibri" pitchFamily="34" charset="-120"/>
-              </a:rPr>
-              <a:t>17</a:t>
-            </a:r>
-            <a:endParaRPr lang="en-US" sz="900" dirty="0"/>
+          <p:cNvPr id="15" name="cuinotes-footer-mark"/>
+          <p:cNvSpPr txBox="1"/>
+          <p:nvPr/>
+        </p:nvSpPr>
+        <p:spPr>
+          <a:xfrm>
+            <a:off x="9951720" y="6455664"/>
+            <a:ext cx="2011680" cy="292608"/>
+          </a:xfrm>
+          <a:prstGeom prst="rect">
+            <a:avLst/>
+          </a:prstGeom>
+          <a:noFill/>
+        </p:spPr>
+        <p:txBody>
+          <a:bodyPr wrap="none" lIns="0" rIns="0" tIns="0" bIns="0">
+            <a:spAutoFit/>
+          </a:bodyPr>
+          <a:lstStyle/>
+          <a:p>
+            <a:pPr algn="r"/>
+            <a:r>
+              <a:rPr sz="1000">
+                <a:solidFill>
+                  <a:srgbClr val="8A939B"/>
+                </a:solidFill>
+                <a:hlinkClick r:id="rId3"/>
+              </a:rPr>
+              <a:t>cuinotes.com</a:t>
+            </a:r>
+            <a:r>
+              <a:rPr sz="1000">
+                <a:solidFill>
+                  <a:srgbClr val="8A939B"/>
+                </a:solidFill>
+              </a:rPr>
+              <a:t>  ·  17</a:t>
+            </a:r>
           </a:p>
         </p:txBody>
       </p:sp>
@@ -7073,6 +6806,10 @@
           </a:solidFill>
           <a:ln/>
         </p:spPr>
+        <p:txBody>
+          <a:bodyPr/>
+          <a:p/>
+        </p:txBody>
       </p:sp>
       <p:sp>
         <p:nvSpPr>
@@ -7246,79 +6983,44 @@
       </p:sp>
       <p:sp>
         <p:nvSpPr>
-          <p:cNvPr id="7" name="Text 5"/>
-          <p:cNvSpPr txBox="1"/>
-          <p:nvPr/>
-        </p:nvSpPr>
-        <p:spPr>
-          <a:xfrm>
-            <a:off x="640080" y="6446520"/>
-            <a:ext cx="8686800" cy="292608"/>
-          </a:xfrm>
-          <a:prstGeom prst="rect">
-            <a:avLst/>
-          </a:prstGeom>
-          <a:noFill/>
-          <a:ln/>
-        </p:spPr>
-        <p:txBody>
-          <a:bodyPr wrap="square" lIns="0" tIns="0" rIns="0" bIns="0" rtlCol="0" anchor="ctr"/>
-          <a:lstStyle/>
-          <a:p>
-            <a:pPr algn="l" indent="0" marL="0">
-              <a:buNone/>
-            </a:pPr>
-            <a:r>
-              <a:rPr lang="en-US" sz="900" dirty="0">
-                <a:solidFill>
-                  <a:srgbClr val="5D5D72"/>
-                </a:solidFill>
-                <a:latin typeface="Calibri" pitchFamily="34" charset="0"/>
-                <a:ea typeface="Calibri" pitchFamily="34" charset="-122"/>
-                <a:cs typeface="Calibri" pitchFamily="34" charset="-120"/>
-              </a:rPr>
-              <a:t>Usman Akram  •  COMSATS University Islamabad</a:t>
-            </a:r>
-            <a:endParaRPr lang="en-US" sz="900" dirty="0"/>
-          </a:p>
-        </p:txBody>
-      </p:sp>
-      <p:sp>
-        <p:nvSpPr>
-          <p:cNvPr id="8" name="Text 6"/>
-          <p:cNvSpPr txBox="1"/>
-          <p:nvPr/>
-        </p:nvSpPr>
-        <p:spPr>
-          <a:xfrm>
-            <a:off x="11155680" y="6446520"/>
-            <a:ext cx="457200" cy="292608"/>
-          </a:xfrm>
-          <a:prstGeom prst="rect">
-            <a:avLst/>
-          </a:prstGeom>
-          <a:noFill/>
-          <a:ln/>
-        </p:spPr>
-        <p:txBody>
-          <a:bodyPr wrap="square" lIns="0" tIns="0" rIns="0" bIns="0" rtlCol="0" anchor="ctr"/>
-          <a:lstStyle/>
-          <a:p>
-            <a:pPr algn="r" indent="0" marL="0">
-              <a:buNone/>
-            </a:pPr>
-            <a:r>
-              <a:rPr lang="en-US" sz="900" dirty="0">
-                <a:solidFill>
-                  <a:srgbClr val="5D5D72"/>
-                </a:solidFill>
-                <a:latin typeface="Calibri" pitchFamily="34" charset="0"/>
-                <a:ea typeface="Calibri" pitchFamily="34" charset="-122"/>
-                <a:cs typeface="Calibri" pitchFamily="34" charset="-120"/>
-              </a:rPr>
-              <a:t>18</a:t>
-            </a:r>
-            <a:endParaRPr lang="en-US" sz="900" dirty="0"/>
+          <p:cNvPr id="9" name="cuinotes-footer-mark"/>
+          <p:cNvSpPr txBox="1"/>
+          <p:nvPr/>
+        </p:nvSpPr>
+        <p:spPr>
+          <a:xfrm>
+            <a:off x="9951720" y="6455664"/>
+            <a:ext cx="2011680" cy="292608"/>
+          </a:xfrm>
+          <a:prstGeom prst="rect">
+            <a:avLst/>
+          </a:prstGeom>
+          <a:noFill/>
+        </p:spPr>
+        <p:txBody>
+          <a:bodyPr wrap="none" lIns="0" rIns="0" tIns="0" bIns="0">
+            <a:spAutoFit/>
+          </a:bodyPr>
+          <a:lstStyle/>
+          <a:p>
+            <a:pPr algn="r"/>
+            <a:r>
+              <a:rPr sz="1000">
+                <a:solidFill>
+                  <a:srgbClr val="8A939B"/>
+                </a:solidFill>
+                <a:hlinkClick r:id="rId3"/>
+              </a:rPr>
+              <a:t>cuinotes.com</a:t>
+            </a:r>
+            <a:r>
+              <a:rPr sz="1000">
+                <a:solidFill>
+                  <a:srgbClr val="8A939B"/>
+                </a:solidFill>
+              </a:rPr>
+              <a:t>  ·  18</a:t>
+            </a:r>
           </a:p>
         </p:txBody>
       </p:sp>
@@ -7453,6 +7155,10 @@
           </a:solidFill>
           <a:ln/>
         </p:spPr>
+        <p:txBody>
+          <a:bodyPr/>
+          <a:p/>
+        </p:txBody>
       </p:sp>
       <p:sp>
         <p:nvSpPr>
@@ -7586,79 +7292,44 @@
       </p:sp>
       <p:sp>
         <p:nvSpPr>
-          <p:cNvPr id="7" name="Text 5"/>
-          <p:cNvSpPr txBox="1"/>
-          <p:nvPr/>
-        </p:nvSpPr>
-        <p:spPr>
-          <a:xfrm>
-            <a:off x="640080" y="6446520"/>
-            <a:ext cx="8686800" cy="292608"/>
-          </a:xfrm>
-          <a:prstGeom prst="rect">
-            <a:avLst/>
-          </a:prstGeom>
-          <a:noFill/>
-          <a:ln/>
-        </p:spPr>
-        <p:txBody>
-          <a:bodyPr wrap="square" lIns="0" tIns="0" rIns="0" bIns="0" rtlCol="0" anchor="ctr"/>
-          <a:lstStyle/>
-          <a:p>
-            <a:pPr algn="l" indent="0" marL="0">
-              <a:buNone/>
-            </a:pPr>
-            <a:r>
-              <a:rPr lang="en-US" sz="900" dirty="0">
-                <a:solidFill>
-                  <a:srgbClr val="5D5D72"/>
-                </a:solidFill>
-                <a:latin typeface="Calibri" pitchFamily="34" charset="0"/>
-                <a:ea typeface="Calibri" pitchFamily="34" charset="-122"/>
-                <a:cs typeface="Calibri" pitchFamily="34" charset="-120"/>
-              </a:rPr>
-              <a:t>Usman Akram  •  COMSATS University Islamabad</a:t>
-            </a:r>
-            <a:endParaRPr lang="en-US" sz="900" dirty="0"/>
-          </a:p>
-        </p:txBody>
-      </p:sp>
-      <p:sp>
-        <p:nvSpPr>
-          <p:cNvPr id="8" name="Text 6"/>
-          <p:cNvSpPr txBox="1"/>
-          <p:nvPr/>
-        </p:nvSpPr>
-        <p:spPr>
-          <a:xfrm>
-            <a:off x="11155680" y="6446520"/>
-            <a:ext cx="457200" cy="292608"/>
-          </a:xfrm>
-          <a:prstGeom prst="rect">
-            <a:avLst/>
-          </a:prstGeom>
-          <a:noFill/>
-          <a:ln/>
-        </p:spPr>
-        <p:txBody>
-          <a:bodyPr wrap="square" lIns="0" tIns="0" rIns="0" bIns="0" rtlCol="0" anchor="ctr"/>
-          <a:lstStyle/>
-          <a:p>
-            <a:pPr algn="r" indent="0" marL="0">
-              <a:buNone/>
-            </a:pPr>
-            <a:r>
-              <a:rPr lang="en-US" sz="900" dirty="0">
-                <a:solidFill>
-                  <a:srgbClr val="5D5D72"/>
-                </a:solidFill>
-                <a:latin typeface="Calibri" pitchFamily="34" charset="0"/>
-                <a:ea typeface="Calibri" pitchFamily="34" charset="-122"/>
-                <a:cs typeface="Calibri" pitchFamily="34" charset="-120"/>
-              </a:rPr>
-              <a:t>19</a:t>
-            </a:r>
-            <a:endParaRPr lang="en-US" sz="900" dirty="0"/>
+          <p:cNvPr id="9" name="cuinotes-footer-mark"/>
+          <p:cNvSpPr txBox="1"/>
+          <p:nvPr/>
+        </p:nvSpPr>
+        <p:spPr>
+          <a:xfrm>
+            <a:off x="9951720" y="6455664"/>
+            <a:ext cx="2011680" cy="292608"/>
+          </a:xfrm>
+          <a:prstGeom prst="rect">
+            <a:avLst/>
+          </a:prstGeom>
+          <a:noFill/>
+        </p:spPr>
+        <p:txBody>
+          <a:bodyPr wrap="none" lIns="0" rIns="0" tIns="0" bIns="0">
+            <a:spAutoFit/>
+          </a:bodyPr>
+          <a:lstStyle/>
+          <a:p>
+            <a:pPr algn="r"/>
+            <a:r>
+              <a:rPr sz="1000">
+                <a:solidFill>
+                  <a:srgbClr val="8A939B"/>
+                </a:solidFill>
+                <a:hlinkClick r:id="rId3"/>
+              </a:rPr>
+              <a:t>cuinotes.com</a:t>
+            </a:r>
+            <a:r>
+              <a:rPr sz="1000">
+                <a:solidFill>
+                  <a:srgbClr val="8A939B"/>
+                </a:solidFill>
+              </a:rPr>
+              <a:t>  ·  19</a:t>
+            </a:r>
           </a:p>
         </p:txBody>
       </p:sp>
@@ -7791,6 +7462,10 @@
           </a:solidFill>
           <a:ln/>
         </p:spPr>
+        <p:txBody>
+          <a:bodyPr/>
+          <a:p/>
+        </p:txBody>
       </p:sp>
       <p:sp>
         <p:nvSpPr>
@@ -7889,6 +7564,10 @@
           </a:solidFill>
           <a:ln/>
         </p:spPr>
+        <p:txBody>
+          <a:bodyPr/>
+          <a:p/>
+        </p:txBody>
       </p:sp>
       <p:sp>
         <p:nvSpPr>
@@ -7987,6 +7666,10 @@
           </a:solidFill>
           <a:ln/>
         </p:spPr>
+        <p:txBody>
+          <a:bodyPr/>
+          <a:p/>
+        </p:txBody>
       </p:sp>
       <p:sp>
         <p:nvSpPr>
@@ -8085,6 +7768,10 @@
           </a:solidFill>
           <a:ln/>
         </p:spPr>
+        <p:txBody>
+          <a:bodyPr/>
+          <a:p/>
+        </p:txBody>
       </p:sp>
       <p:sp>
         <p:nvSpPr>
@@ -8183,6 +7870,10 @@
           </a:solidFill>
           <a:ln/>
         </p:spPr>
+        <p:txBody>
+          <a:bodyPr/>
+          <a:p/>
+        </p:txBody>
       </p:sp>
       <p:sp>
         <p:nvSpPr>
@@ -8264,79 +7955,44 @@
       </p:sp>
       <p:sp>
         <p:nvSpPr>
-          <p:cNvPr id="19" name="Text 17"/>
-          <p:cNvSpPr txBox="1"/>
-          <p:nvPr/>
-        </p:nvSpPr>
-        <p:spPr>
-          <a:xfrm>
-            <a:off x="640080" y="6446520"/>
-            <a:ext cx="8686800" cy="292608"/>
-          </a:xfrm>
-          <a:prstGeom prst="rect">
-            <a:avLst/>
-          </a:prstGeom>
-          <a:noFill/>
-          <a:ln/>
-        </p:spPr>
-        <p:txBody>
-          <a:bodyPr wrap="square" lIns="0" tIns="0" rIns="0" bIns="0" rtlCol="0" anchor="ctr"/>
-          <a:lstStyle/>
-          <a:p>
-            <a:pPr algn="l" indent="0" marL="0">
-              <a:buNone/>
-            </a:pPr>
-            <a:r>
-              <a:rPr lang="en-US" sz="900" dirty="0">
-                <a:solidFill>
-                  <a:srgbClr val="5D5D72"/>
-                </a:solidFill>
-                <a:latin typeface="Calibri" pitchFamily="34" charset="0"/>
-                <a:ea typeface="Calibri" pitchFamily="34" charset="-122"/>
-                <a:cs typeface="Calibri" pitchFamily="34" charset="-120"/>
-              </a:rPr>
-              <a:t>Usman Akram  •  COMSATS University Islamabad</a:t>
-            </a:r>
-            <a:endParaRPr lang="en-US" sz="900" dirty="0"/>
-          </a:p>
-        </p:txBody>
-      </p:sp>
-      <p:sp>
-        <p:nvSpPr>
-          <p:cNvPr id="20" name="Text 18"/>
-          <p:cNvSpPr txBox="1"/>
-          <p:nvPr/>
-        </p:nvSpPr>
-        <p:spPr>
-          <a:xfrm>
-            <a:off x="11155680" y="6446520"/>
-            <a:ext cx="457200" cy="292608"/>
-          </a:xfrm>
-          <a:prstGeom prst="rect">
-            <a:avLst/>
-          </a:prstGeom>
-          <a:noFill/>
-          <a:ln/>
-        </p:spPr>
-        <p:txBody>
-          <a:bodyPr wrap="square" lIns="0" tIns="0" rIns="0" bIns="0" rtlCol="0" anchor="ctr"/>
-          <a:lstStyle/>
-          <a:p>
-            <a:pPr algn="r" indent="0" marL="0">
-              <a:buNone/>
-            </a:pPr>
-            <a:r>
-              <a:rPr lang="en-US" sz="900" dirty="0">
-                <a:solidFill>
-                  <a:srgbClr val="5D5D72"/>
-                </a:solidFill>
-                <a:latin typeface="Calibri" pitchFamily="34" charset="0"/>
-                <a:ea typeface="Calibri" pitchFamily="34" charset="-122"/>
-                <a:cs typeface="Calibri" pitchFamily="34" charset="-120"/>
-              </a:rPr>
-              <a:t>2</a:t>
-            </a:r>
-            <a:endParaRPr lang="en-US" sz="900" dirty="0"/>
+          <p:cNvPr id="21" name="cuinotes-footer-mark"/>
+          <p:cNvSpPr txBox="1"/>
+          <p:nvPr/>
+        </p:nvSpPr>
+        <p:spPr>
+          <a:xfrm>
+            <a:off x="9951720" y="6455664"/>
+            <a:ext cx="2011680" cy="292608"/>
+          </a:xfrm>
+          <a:prstGeom prst="rect">
+            <a:avLst/>
+          </a:prstGeom>
+          <a:noFill/>
+        </p:spPr>
+        <p:txBody>
+          <a:bodyPr wrap="none" lIns="0" rIns="0" tIns="0" bIns="0">
+            <a:spAutoFit/>
+          </a:bodyPr>
+          <a:lstStyle/>
+          <a:p>
+            <a:pPr algn="r"/>
+            <a:r>
+              <a:rPr sz="1000">
+                <a:solidFill>
+                  <a:srgbClr val="8A939B"/>
+                </a:solidFill>
+                <a:hlinkClick r:id="rId3"/>
+              </a:rPr>
+              <a:t>cuinotes.com</a:t>
+            </a:r>
+            <a:r>
+              <a:rPr sz="1000">
+                <a:solidFill>
+                  <a:srgbClr val="8A939B"/>
+                </a:solidFill>
+              </a:rPr>
+              <a:t>  ·  2</a:t>
+            </a:r>
           </a:p>
         </p:txBody>
       </p:sp>
@@ -8476,6 +8132,10 @@
             <a:prstDash val="solid"/>
           </a:ln>
         </p:spPr>
+        <p:txBody>
+          <a:bodyPr/>
+          <a:p/>
+        </p:txBody>
       </p:sp>
       <p:sp>
         <p:nvSpPr>
@@ -8648,6 +8308,10 @@
             <a:prstDash val="solid"/>
           </a:ln>
         </p:spPr>
+        <p:txBody>
+          <a:bodyPr/>
+          <a:p/>
+        </p:txBody>
       </p:sp>
       <p:sp>
         <p:nvSpPr>
@@ -8796,79 +8460,44 @@
       </p:sp>
       <p:sp>
         <p:nvSpPr>
-          <p:cNvPr id="10" name="Text 8"/>
-          <p:cNvSpPr txBox="1"/>
-          <p:nvPr/>
-        </p:nvSpPr>
-        <p:spPr>
-          <a:xfrm>
-            <a:off x="640080" y="6446520"/>
-            <a:ext cx="8686800" cy="292608"/>
-          </a:xfrm>
-          <a:prstGeom prst="rect">
-            <a:avLst/>
-          </a:prstGeom>
-          <a:noFill/>
-          <a:ln/>
-        </p:spPr>
-        <p:txBody>
-          <a:bodyPr wrap="square" lIns="0" tIns="0" rIns="0" bIns="0" rtlCol="0" anchor="ctr"/>
-          <a:lstStyle/>
-          <a:p>
-            <a:pPr algn="l" indent="0" marL="0">
-              <a:buNone/>
-            </a:pPr>
-            <a:r>
-              <a:rPr lang="en-US" sz="900" dirty="0">
-                <a:solidFill>
-                  <a:srgbClr val="5D5D72"/>
-                </a:solidFill>
-                <a:latin typeface="Calibri" pitchFamily="34" charset="0"/>
-                <a:ea typeface="Calibri" pitchFamily="34" charset="-122"/>
-                <a:cs typeface="Calibri" pitchFamily="34" charset="-120"/>
-              </a:rPr>
-              <a:t>Usman Akram  •  COMSATS University Islamabad</a:t>
-            </a:r>
-            <a:endParaRPr lang="en-US" sz="900" dirty="0"/>
-          </a:p>
-        </p:txBody>
-      </p:sp>
-      <p:sp>
-        <p:nvSpPr>
-          <p:cNvPr id="11" name="Text 9"/>
-          <p:cNvSpPr txBox="1"/>
-          <p:nvPr/>
-        </p:nvSpPr>
-        <p:spPr>
-          <a:xfrm>
-            <a:off x="11155680" y="6446520"/>
-            <a:ext cx="457200" cy="292608"/>
-          </a:xfrm>
-          <a:prstGeom prst="rect">
-            <a:avLst/>
-          </a:prstGeom>
-          <a:noFill/>
-          <a:ln/>
-        </p:spPr>
-        <p:txBody>
-          <a:bodyPr wrap="square" lIns="0" tIns="0" rIns="0" bIns="0" rtlCol="0" anchor="ctr"/>
-          <a:lstStyle/>
-          <a:p>
-            <a:pPr algn="r" indent="0" marL="0">
-              <a:buNone/>
-            </a:pPr>
-            <a:r>
-              <a:rPr lang="en-US" sz="900" dirty="0">
-                <a:solidFill>
-                  <a:srgbClr val="5D5D72"/>
-                </a:solidFill>
-                <a:latin typeface="Calibri" pitchFamily="34" charset="0"/>
-                <a:ea typeface="Calibri" pitchFamily="34" charset="-122"/>
-                <a:cs typeface="Calibri" pitchFamily="34" charset="-120"/>
-              </a:rPr>
-              <a:t>20</a:t>
-            </a:r>
-            <a:endParaRPr lang="en-US" sz="900" dirty="0"/>
+          <p:cNvPr id="12" name="cuinotes-footer-mark"/>
+          <p:cNvSpPr txBox="1"/>
+          <p:nvPr/>
+        </p:nvSpPr>
+        <p:spPr>
+          <a:xfrm>
+            <a:off x="9951720" y="6455664"/>
+            <a:ext cx="2011680" cy="292608"/>
+          </a:xfrm>
+          <a:prstGeom prst="rect">
+            <a:avLst/>
+          </a:prstGeom>
+          <a:noFill/>
+        </p:spPr>
+        <p:txBody>
+          <a:bodyPr wrap="none" lIns="0" rIns="0" tIns="0" bIns="0">
+            <a:spAutoFit/>
+          </a:bodyPr>
+          <a:lstStyle/>
+          <a:p>
+            <a:pPr algn="r"/>
+            <a:r>
+              <a:rPr sz="1000">
+                <a:solidFill>
+                  <a:srgbClr val="8A939B"/>
+                </a:solidFill>
+                <a:hlinkClick r:id="rId3"/>
+              </a:rPr>
+              <a:t>cuinotes.com</a:t>
+            </a:r>
+            <a:r>
+              <a:rPr sz="1000">
+                <a:solidFill>
+                  <a:srgbClr val="8A939B"/>
+                </a:solidFill>
+              </a:rPr>
+              <a:t>  ·  20</a:t>
+            </a:r>
           </a:p>
         </p:txBody>
       </p:sp>
@@ -9003,6 +8632,10 @@
           </a:solidFill>
           <a:ln/>
         </p:spPr>
+        <p:txBody>
+          <a:bodyPr/>
+          <a:p/>
+        </p:txBody>
       </p:sp>
       <p:sp>
         <p:nvSpPr>
@@ -9117,79 +8750,44 @@
       </p:sp>
       <p:sp>
         <p:nvSpPr>
-          <p:cNvPr id="6" name="Text 4"/>
-          <p:cNvSpPr txBox="1"/>
-          <p:nvPr/>
-        </p:nvSpPr>
-        <p:spPr>
-          <a:xfrm>
-            <a:off x="640080" y="6446520"/>
-            <a:ext cx="8686800" cy="292608"/>
-          </a:xfrm>
-          <a:prstGeom prst="rect">
-            <a:avLst/>
-          </a:prstGeom>
-          <a:noFill/>
-          <a:ln/>
-        </p:spPr>
-        <p:txBody>
-          <a:bodyPr wrap="square" lIns="0" tIns="0" rIns="0" bIns="0" rtlCol="0" anchor="ctr"/>
-          <a:lstStyle/>
-          <a:p>
-            <a:pPr algn="l" indent="0" marL="0">
-              <a:buNone/>
-            </a:pPr>
-            <a:r>
-              <a:rPr lang="en-US" sz="900" dirty="0">
-                <a:solidFill>
-                  <a:srgbClr val="5D5D72"/>
-                </a:solidFill>
-                <a:latin typeface="Calibri" pitchFamily="34" charset="0"/>
-                <a:ea typeface="Calibri" pitchFamily="34" charset="-122"/>
-                <a:cs typeface="Calibri" pitchFamily="34" charset="-120"/>
-              </a:rPr>
-              <a:t>Usman Akram  •  COMSATS University Islamabad</a:t>
-            </a:r>
-            <a:endParaRPr lang="en-US" sz="900" dirty="0"/>
-          </a:p>
-        </p:txBody>
-      </p:sp>
-      <p:sp>
-        <p:nvSpPr>
-          <p:cNvPr id="7" name="Text 5"/>
-          <p:cNvSpPr txBox="1"/>
-          <p:nvPr/>
-        </p:nvSpPr>
-        <p:spPr>
-          <a:xfrm>
-            <a:off x="11155680" y="6446520"/>
-            <a:ext cx="457200" cy="292608"/>
-          </a:xfrm>
-          <a:prstGeom prst="rect">
-            <a:avLst/>
-          </a:prstGeom>
-          <a:noFill/>
-          <a:ln/>
-        </p:spPr>
-        <p:txBody>
-          <a:bodyPr wrap="square" lIns="0" tIns="0" rIns="0" bIns="0" rtlCol="0" anchor="ctr"/>
-          <a:lstStyle/>
-          <a:p>
-            <a:pPr algn="r" indent="0" marL="0">
-              <a:buNone/>
-            </a:pPr>
-            <a:r>
-              <a:rPr lang="en-US" sz="900" dirty="0">
-                <a:solidFill>
-                  <a:srgbClr val="5D5D72"/>
-                </a:solidFill>
-                <a:latin typeface="Calibri" pitchFamily="34" charset="0"/>
-                <a:ea typeface="Calibri" pitchFamily="34" charset="-122"/>
-                <a:cs typeface="Calibri" pitchFamily="34" charset="-120"/>
-              </a:rPr>
-              <a:t>21</a:t>
-            </a:r>
-            <a:endParaRPr lang="en-US" sz="900" dirty="0"/>
+          <p:cNvPr id="8" name="cuinotes-footer-mark"/>
+          <p:cNvSpPr txBox="1"/>
+          <p:nvPr/>
+        </p:nvSpPr>
+        <p:spPr>
+          <a:xfrm>
+            <a:off x="9951720" y="6455664"/>
+            <a:ext cx="2011680" cy="292608"/>
+          </a:xfrm>
+          <a:prstGeom prst="rect">
+            <a:avLst/>
+          </a:prstGeom>
+          <a:noFill/>
+        </p:spPr>
+        <p:txBody>
+          <a:bodyPr wrap="none" lIns="0" rIns="0" tIns="0" bIns="0">
+            <a:spAutoFit/>
+          </a:bodyPr>
+          <a:lstStyle/>
+          <a:p>
+            <a:pPr algn="r"/>
+            <a:r>
+              <a:rPr sz="1000">
+                <a:solidFill>
+                  <a:srgbClr val="8A939B"/>
+                </a:solidFill>
+                <a:hlinkClick r:id="rId3"/>
+              </a:rPr>
+              <a:t>cuinotes.com</a:t>
+            </a:r>
+            <a:r>
+              <a:rPr sz="1000">
+                <a:solidFill>
+                  <a:srgbClr val="8A939B"/>
+                </a:solidFill>
+              </a:rPr>
+              <a:t>  ·  21</a:t>
+            </a:r>
           </a:p>
         </p:txBody>
       </p:sp>
@@ -9324,6 +8922,10 @@
           </a:solidFill>
           <a:ln/>
         </p:spPr>
+        <p:txBody>
+          <a:bodyPr/>
+          <a:p/>
+        </p:txBody>
       </p:sp>
       <p:sp>
         <p:nvSpPr>
@@ -9467,79 +9069,44 @@
       </p:sp>
       <p:sp>
         <p:nvSpPr>
-          <p:cNvPr id="6" name="Text 4"/>
-          <p:cNvSpPr txBox="1"/>
-          <p:nvPr/>
-        </p:nvSpPr>
-        <p:spPr>
-          <a:xfrm>
-            <a:off x="640080" y="6446520"/>
-            <a:ext cx="8686800" cy="292608"/>
-          </a:xfrm>
-          <a:prstGeom prst="rect">
-            <a:avLst/>
-          </a:prstGeom>
-          <a:noFill/>
-          <a:ln/>
-        </p:spPr>
-        <p:txBody>
-          <a:bodyPr wrap="square" lIns="0" tIns="0" rIns="0" bIns="0" rtlCol="0" anchor="ctr"/>
-          <a:lstStyle/>
-          <a:p>
-            <a:pPr algn="l" indent="0" marL="0">
-              <a:buNone/>
-            </a:pPr>
-            <a:r>
-              <a:rPr lang="en-US" sz="900" dirty="0">
-                <a:solidFill>
-                  <a:srgbClr val="5D5D72"/>
-                </a:solidFill>
-                <a:latin typeface="Calibri" pitchFamily="34" charset="0"/>
-                <a:ea typeface="Calibri" pitchFamily="34" charset="-122"/>
-                <a:cs typeface="Calibri" pitchFamily="34" charset="-120"/>
-              </a:rPr>
-              <a:t>Usman Akram  •  COMSATS University Islamabad</a:t>
-            </a:r>
-            <a:endParaRPr lang="en-US" sz="900" dirty="0"/>
-          </a:p>
-        </p:txBody>
-      </p:sp>
-      <p:sp>
-        <p:nvSpPr>
-          <p:cNvPr id="7" name="Text 5"/>
-          <p:cNvSpPr txBox="1"/>
-          <p:nvPr/>
-        </p:nvSpPr>
-        <p:spPr>
-          <a:xfrm>
-            <a:off x="11155680" y="6446520"/>
-            <a:ext cx="457200" cy="292608"/>
-          </a:xfrm>
-          <a:prstGeom prst="rect">
-            <a:avLst/>
-          </a:prstGeom>
-          <a:noFill/>
-          <a:ln/>
-        </p:spPr>
-        <p:txBody>
-          <a:bodyPr wrap="square" lIns="0" tIns="0" rIns="0" bIns="0" rtlCol="0" anchor="ctr"/>
-          <a:lstStyle/>
-          <a:p>
-            <a:pPr algn="r" indent="0" marL="0">
-              <a:buNone/>
-            </a:pPr>
-            <a:r>
-              <a:rPr lang="en-US" sz="900" dirty="0">
-                <a:solidFill>
-                  <a:srgbClr val="5D5D72"/>
-                </a:solidFill>
-                <a:latin typeface="Calibri" pitchFamily="34" charset="0"/>
-                <a:ea typeface="Calibri" pitchFamily="34" charset="-122"/>
-                <a:cs typeface="Calibri" pitchFamily="34" charset="-120"/>
-              </a:rPr>
-              <a:t>22</a:t>
-            </a:r>
-            <a:endParaRPr lang="en-US" sz="900" dirty="0"/>
+          <p:cNvPr id="8" name="cuinotes-footer-mark"/>
+          <p:cNvSpPr txBox="1"/>
+          <p:nvPr/>
+        </p:nvSpPr>
+        <p:spPr>
+          <a:xfrm>
+            <a:off x="9951720" y="6455664"/>
+            <a:ext cx="2011680" cy="292608"/>
+          </a:xfrm>
+          <a:prstGeom prst="rect">
+            <a:avLst/>
+          </a:prstGeom>
+          <a:noFill/>
+        </p:spPr>
+        <p:txBody>
+          <a:bodyPr wrap="none" lIns="0" rIns="0" tIns="0" bIns="0">
+            <a:spAutoFit/>
+          </a:bodyPr>
+          <a:lstStyle/>
+          <a:p>
+            <a:pPr algn="r"/>
+            <a:r>
+              <a:rPr sz="1000">
+                <a:solidFill>
+                  <a:srgbClr val="8A939B"/>
+                </a:solidFill>
+                <a:hlinkClick r:id="rId3"/>
+              </a:rPr>
+              <a:t>cuinotes.com</a:t>
+            </a:r>
+            <a:r>
+              <a:rPr sz="1000">
+                <a:solidFill>
+                  <a:srgbClr val="8A939B"/>
+                </a:solidFill>
+              </a:rPr>
+              <a:t>  ·  22</a:t>
+            </a:r>
           </a:p>
         </p:txBody>
       </p:sp>
@@ -9679,6 +9246,10 @@
             <a:prstDash val="solid"/>
           </a:ln>
         </p:spPr>
+        <p:txBody>
+          <a:bodyPr/>
+          <a:p/>
+        </p:txBody>
       </p:sp>
       <p:sp>
         <p:nvSpPr>
@@ -9760,79 +9331,44 @@
       </p:sp>
       <p:sp>
         <p:nvSpPr>
-          <p:cNvPr id="7" name="Text 5"/>
-          <p:cNvSpPr txBox="1"/>
-          <p:nvPr/>
-        </p:nvSpPr>
-        <p:spPr>
-          <a:xfrm>
-            <a:off x="640080" y="6446520"/>
-            <a:ext cx="8686800" cy="292608"/>
-          </a:xfrm>
-          <a:prstGeom prst="rect">
-            <a:avLst/>
-          </a:prstGeom>
-          <a:noFill/>
-          <a:ln/>
-        </p:spPr>
-        <p:txBody>
-          <a:bodyPr wrap="square" lIns="0" tIns="0" rIns="0" bIns="0" rtlCol="0" anchor="ctr"/>
-          <a:lstStyle/>
-          <a:p>
-            <a:pPr algn="l" indent="0" marL="0">
-              <a:buNone/>
-            </a:pPr>
-            <a:r>
-              <a:rPr lang="en-US" sz="900" dirty="0">
-                <a:solidFill>
-                  <a:srgbClr val="5D5D72"/>
-                </a:solidFill>
-                <a:latin typeface="Calibri" pitchFamily="34" charset="0"/>
-                <a:ea typeface="Calibri" pitchFamily="34" charset="-122"/>
-                <a:cs typeface="Calibri" pitchFamily="34" charset="-120"/>
-              </a:rPr>
-              <a:t>Usman Akram  •  COMSATS University Islamabad</a:t>
-            </a:r>
-            <a:endParaRPr lang="en-US" sz="900" dirty="0"/>
-          </a:p>
-        </p:txBody>
-      </p:sp>
-      <p:sp>
-        <p:nvSpPr>
-          <p:cNvPr id="8" name="Text 6"/>
-          <p:cNvSpPr txBox="1"/>
-          <p:nvPr/>
-        </p:nvSpPr>
-        <p:spPr>
-          <a:xfrm>
-            <a:off x="11155680" y="6446520"/>
-            <a:ext cx="457200" cy="292608"/>
-          </a:xfrm>
-          <a:prstGeom prst="rect">
-            <a:avLst/>
-          </a:prstGeom>
-          <a:noFill/>
-          <a:ln/>
-        </p:spPr>
-        <p:txBody>
-          <a:bodyPr wrap="square" lIns="0" tIns="0" rIns="0" bIns="0" rtlCol="0" anchor="ctr"/>
-          <a:lstStyle/>
-          <a:p>
-            <a:pPr algn="r" indent="0" marL="0">
-              <a:buNone/>
-            </a:pPr>
-            <a:r>
-              <a:rPr lang="en-US" sz="900" dirty="0">
-                <a:solidFill>
-                  <a:srgbClr val="5D5D72"/>
-                </a:solidFill>
-                <a:latin typeface="Calibri" pitchFamily="34" charset="0"/>
-                <a:ea typeface="Calibri" pitchFamily="34" charset="-122"/>
-                <a:cs typeface="Calibri" pitchFamily="34" charset="-120"/>
-              </a:rPr>
-              <a:t>23</a:t>
-            </a:r>
-            <a:endParaRPr lang="en-US" sz="900" dirty="0"/>
+          <p:cNvPr id="9" name="cuinotes-footer-mark"/>
+          <p:cNvSpPr txBox="1"/>
+          <p:nvPr/>
+        </p:nvSpPr>
+        <p:spPr>
+          <a:xfrm>
+            <a:off x="9951720" y="6455664"/>
+            <a:ext cx="2011680" cy="292608"/>
+          </a:xfrm>
+          <a:prstGeom prst="rect">
+            <a:avLst/>
+          </a:prstGeom>
+          <a:noFill/>
+        </p:spPr>
+        <p:txBody>
+          <a:bodyPr wrap="none" lIns="0" rIns="0" tIns="0" bIns="0">
+            <a:spAutoFit/>
+          </a:bodyPr>
+          <a:lstStyle/>
+          <a:p>
+            <a:pPr algn="r"/>
+            <a:r>
+              <a:rPr sz="1000">
+                <a:solidFill>
+                  <a:srgbClr val="8A939B"/>
+                </a:solidFill>
+                <a:hlinkClick r:id="rId3"/>
+              </a:rPr>
+              <a:t>cuinotes.com</a:t>
+            </a:r>
+            <a:r>
+              <a:rPr sz="1000">
+                <a:solidFill>
+                  <a:srgbClr val="8A939B"/>
+                </a:solidFill>
+              </a:rPr>
+              <a:t>  ·  23</a:t>
+            </a:r>
           </a:p>
         </p:txBody>
       </p:sp>
@@ -9967,6 +9503,10 @@
           </a:solidFill>
           <a:ln/>
         </p:spPr>
+        <p:txBody>
+          <a:bodyPr/>
+          <a:p/>
+        </p:txBody>
       </p:sp>
       <p:sp>
         <p:nvSpPr>
@@ -10260,79 +9800,44 @@
       </p:sp>
       <p:sp>
         <p:nvSpPr>
-          <p:cNvPr id="7" name="Text 5"/>
-          <p:cNvSpPr txBox="1"/>
-          <p:nvPr/>
-        </p:nvSpPr>
-        <p:spPr>
-          <a:xfrm>
-            <a:off x="640080" y="6446520"/>
-            <a:ext cx="8686800" cy="292608"/>
-          </a:xfrm>
-          <a:prstGeom prst="rect">
-            <a:avLst/>
-          </a:prstGeom>
-          <a:noFill/>
-          <a:ln/>
-        </p:spPr>
-        <p:txBody>
-          <a:bodyPr wrap="square" lIns="0" tIns="0" rIns="0" bIns="0" rtlCol="0" anchor="ctr"/>
-          <a:lstStyle/>
-          <a:p>
-            <a:pPr algn="l" indent="0" marL="0">
-              <a:buNone/>
-            </a:pPr>
-            <a:r>
-              <a:rPr lang="en-US" sz="900" dirty="0">
-                <a:solidFill>
-                  <a:srgbClr val="5D5D72"/>
-                </a:solidFill>
-                <a:latin typeface="Calibri" pitchFamily="34" charset="0"/>
-                <a:ea typeface="Calibri" pitchFamily="34" charset="-122"/>
-                <a:cs typeface="Calibri" pitchFamily="34" charset="-120"/>
-              </a:rPr>
-              <a:t>Usman Akram  •  COMSATS University Islamabad</a:t>
-            </a:r>
-            <a:endParaRPr lang="en-US" sz="900" dirty="0"/>
-          </a:p>
-        </p:txBody>
-      </p:sp>
-      <p:sp>
-        <p:nvSpPr>
-          <p:cNvPr id="8" name="Text 6"/>
-          <p:cNvSpPr txBox="1"/>
-          <p:nvPr/>
-        </p:nvSpPr>
-        <p:spPr>
-          <a:xfrm>
-            <a:off x="11155680" y="6446520"/>
-            <a:ext cx="457200" cy="292608"/>
-          </a:xfrm>
-          <a:prstGeom prst="rect">
-            <a:avLst/>
-          </a:prstGeom>
-          <a:noFill/>
-          <a:ln/>
-        </p:spPr>
-        <p:txBody>
-          <a:bodyPr wrap="square" lIns="0" tIns="0" rIns="0" bIns="0" rtlCol="0" anchor="ctr"/>
-          <a:lstStyle/>
-          <a:p>
-            <a:pPr algn="r" indent="0" marL="0">
-              <a:buNone/>
-            </a:pPr>
-            <a:r>
-              <a:rPr lang="en-US" sz="900" dirty="0">
-                <a:solidFill>
-                  <a:srgbClr val="5D5D72"/>
-                </a:solidFill>
-                <a:latin typeface="Calibri" pitchFamily="34" charset="0"/>
-                <a:ea typeface="Calibri" pitchFamily="34" charset="-122"/>
-                <a:cs typeface="Calibri" pitchFamily="34" charset="-120"/>
-              </a:rPr>
-              <a:t>24</a:t>
-            </a:r>
-            <a:endParaRPr lang="en-US" sz="900" dirty="0"/>
+          <p:cNvPr id="9" name="cuinotes-footer-mark"/>
+          <p:cNvSpPr txBox="1"/>
+          <p:nvPr/>
+        </p:nvSpPr>
+        <p:spPr>
+          <a:xfrm>
+            <a:off x="9951720" y="6455664"/>
+            <a:ext cx="2011680" cy="292608"/>
+          </a:xfrm>
+          <a:prstGeom prst="rect">
+            <a:avLst/>
+          </a:prstGeom>
+          <a:noFill/>
+        </p:spPr>
+        <p:txBody>
+          <a:bodyPr wrap="none" lIns="0" rIns="0" tIns="0" bIns="0">
+            <a:spAutoFit/>
+          </a:bodyPr>
+          <a:lstStyle/>
+          <a:p>
+            <a:pPr algn="r"/>
+            <a:r>
+              <a:rPr sz="1000">
+                <a:solidFill>
+                  <a:srgbClr val="8A939B"/>
+                </a:solidFill>
+                <a:hlinkClick r:id="rId3"/>
+              </a:rPr>
+              <a:t>cuinotes.com</a:t>
+            </a:r>
+            <a:r>
+              <a:rPr sz="1000">
+                <a:solidFill>
+                  <a:srgbClr val="8A939B"/>
+                </a:solidFill>
+              </a:rPr>
+              <a:t>  ·  24</a:t>
+            </a:r>
           </a:p>
         </p:txBody>
       </p:sp>
@@ -10467,6 +9972,10 @@
           </a:solidFill>
           <a:ln/>
         </p:spPr>
+        <p:txBody>
+          <a:bodyPr/>
+          <a:p/>
+        </p:txBody>
       </p:sp>
       <p:sp>
         <p:nvSpPr>
@@ -10809,79 +10318,44 @@
       </p:sp>
       <p:sp>
         <p:nvSpPr>
-          <p:cNvPr id="7" name="Text 5"/>
-          <p:cNvSpPr txBox="1"/>
-          <p:nvPr/>
-        </p:nvSpPr>
-        <p:spPr>
-          <a:xfrm>
-            <a:off x="640080" y="6446520"/>
-            <a:ext cx="8686800" cy="292608"/>
-          </a:xfrm>
-          <a:prstGeom prst="rect">
-            <a:avLst/>
-          </a:prstGeom>
-          <a:noFill/>
-          <a:ln/>
-        </p:spPr>
-        <p:txBody>
-          <a:bodyPr wrap="square" lIns="0" tIns="0" rIns="0" bIns="0" rtlCol="0" anchor="ctr"/>
-          <a:lstStyle/>
-          <a:p>
-            <a:pPr algn="l" indent="0" marL="0">
-              <a:buNone/>
-            </a:pPr>
-            <a:r>
-              <a:rPr lang="en-US" sz="900" dirty="0">
-                <a:solidFill>
-                  <a:srgbClr val="5D5D72"/>
-                </a:solidFill>
-                <a:latin typeface="Calibri" pitchFamily="34" charset="0"/>
-                <a:ea typeface="Calibri" pitchFamily="34" charset="-122"/>
-                <a:cs typeface="Calibri" pitchFamily="34" charset="-120"/>
-              </a:rPr>
-              <a:t>Usman Akram  •  COMSATS University Islamabad</a:t>
-            </a:r>
-            <a:endParaRPr lang="en-US" sz="900" dirty="0"/>
-          </a:p>
-        </p:txBody>
-      </p:sp>
-      <p:sp>
-        <p:nvSpPr>
-          <p:cNvPr id="8" name="Text 6"/>
-          <p:cNvSpPr txBox="1"/>
-          <p:nvPr/>
-        </p:nvSpPr>
-        <p:spPr>
-          <a:xfrm>
-            <a:off x="11155680" y="6446520"/>
-            <a:ext cx="457200" cy="292608"/>
-          </a:xfrm>
-          <a:prstGeom prst="rect">
-            <a:avLst/>
-          </a:prstGeom>
-          <a:noFill/>
-          <a:ln/>
-        </p:spPr>
-        <p:txBody>
-          <a:bodyPr wrap="square" lIns="0" tIns="0" rIns="0" bIns="0" rtlCol="0" anchor="ctr"/>
-          <a:lstStyle/>
-          <a:p>
-            <a:pPr algn="r" indent="0" marL="0">
-              <a:buNone/>
-            </a:pPr>
-            <a:r>
-              <a:rPr lang="en-US" sz="900" dirty="0">
-                <a:solidFill>
-                  <a:srgbClr val="5D5D72"/>
-                </a:solidFill>
-                <a:latin typeface="Calibri" pitchFamily="34" charset="0"/>
-                <a:ea typeface="Calibri" pitchFamily="34" charset="-122"/>
-                <a:cs typeface="Calibri" pitchFamily="34" charset="-120"/>
-              </a:rPr>
-              <a:t>25</a:t>
-            </a:r>
-            <a:endParaRPr lang="en-US" sz="900" dirty="0"/>
+          <p:cNvPr id="9" name="cuinotes-footer-mark"/>
+          <p:cNvSpPr txBox="1"/>
+          <p:nvPr/>
+        </p:nvSpPr>
+        <p:spPr>
+          <a:xfrm>
+            <a:off x="9951720" y="6455664"/>
+            <a:ext cx="2011680" cy="292608"/>
+          </a:xfrm>
+          <a:prstGeom prst="rect">
+            <a:avLst/>
+          </a:prstGeom>
+          <a:noFill/>
+        </p:spPr>
+        <p:txBody>
+          <a:bodyPr wrap="none" lIns="0" rIns="0" tIns="0" bIns="0">
+            <a:spAutoFit/>
+          </a:bodyPr>
+          <a:lstStyle/>
+          <a:p>
+            <a:pPr algn="r"/>
+            <a:r>
+              <a:rPr sz="1000">
+                <a:solidFill>
+                  <a:srgbClr val="8A939B"/>
+                </a:solidFill>
+                <a:hlinkClick r:id="rId3"/>
+              </a:rPr>
+              <a:t>cuinotes.com</a:t>
+            </a:r>
+            <a:r>
+              <a:rPr sz="1000">
+                <a:solidFill>
+                  <a:srgbClr val="8A939B"/>
+                </a:solidFill>
+              </a:rPr>
+              <a:t>  ·  25</a:t>
+            </a:r>
           </a:p>
         </p:txBody>
       </p:sp>
@@ -11014,6 +10488,10 @@
           </a:solidFill>
           <a:ln/>
         </p:spPr>
+        <p:txBody>
+          <a:bodyPr/>
+          <a:p/>
+        </p:txBody>
       </p:sp>
       <p:sp>
         <p:nvSpPr>
@@ -11112,6 +10590,10 @@
           </a:solidFill>
           <a:ln/>
         </p:spPr>
+        <p:txBody>
+          <a:bodyPr/>
+          <a:p/>
+        </p:txBody>
       </p:sp>
       <p:sp>
         <p:nvSpPr>
@@ -11210,6 +10692,10 @@
           </a:solidFill>
           <a:ln/>
         </p:spPr>
+        <p:txBody>
+          <a:bodyPr/>
+          <a:p/>
+        </p:txBody>
       </p:sp>
       <p:sp>
         <p:nvSpPr>
@@ -11308,6 +10794,10 @@
           </a:solidFill>
           <a:ln/>
         </p:spPr>
+        <p:txBody>
+          <a:bodyPr/>
+          <a:p/>
+        </p:txBody>
       </p:sp>
       <p:sp>
         <p:nvSpPr>
@@ -11406,6 +10896,10 @@
           </a:solidFill>
           <a:ln/>
         </p:spPr>
+        <p:txBody>
+          <a:bodyPr/>
+          <a:p/>
+        </p:txBody>
       </p:sp>
       <p:sp>
         <p:nvSpPr>
@@ -11504,6 +10998,10 @@
           </a:solidFill>
           <a:ln/>
         </p:spPr>
+        <p:txBody>
+          <a:bodyPr/>
+          <a:p/>
+        </p:txBody>
       </p:sp>
       <p:sp>
         <p:nvSpPr>
@@ -11602,6 +11100,10 @@
           </a:solidFill>
           <a:ln/>
         </p:spPr>
+        <p:txBody>
+          <a:bodyPr/>
+          <a:p/>
+        </p:txBody>
       </p:sp>
       <p:sp>
         <p:nvSpPr>
@@ -11683,79 +11185,44 @@
       </p:sp>
       <p:sp>
         <p:nvSpPr>
-          <p:cNvPr id="25" name="Text 23"/>
-          <p:cNvSpPr txBox="1"/>
-          <p:nvPr/>
-        </p:nvSpPr>
-        <p:spPr>
-          <a:xfrm>
-            <a:off x="640080" y="6446520"/>
-            <a:ext cx="8686800" cy="292608"/>
-          </a:xfrm>
-          <a:prstGeom prst="rect">
-            <a:avLst/>
-          </a:prstGeom>
-          <a:noFill/>
-          <a:ln/>
-        </p:spPr>
-        <p:txBody>
-          <a:bodyPr wrap="square" lIns="0" tIns="0" rIns="0" bIns="0" rtlCol="0" anchor="ctr"/>
-          <a:lstStyle/>
-          <a:p>
-            <a:pPr algn="l" indent="0" marL="0">
-              <a:buNone/>
-            </a:pPr>
-            <a:r>
-              <a:rPr lang="en-US" sz="900" dirty="0">
-                <a:solidFill>
-                  <a:srgbClr val="9AA3D8"/>
-                </a:solidFill>
-                <a:latin typeface="Calibri" pitchFamily="34" charset="0"/>
-                <a:ea typeface="Calibri" pitchFamily="34" charset="-122"/>
-                <a:cs typeface="Calibri" pitchFamily="34" charset="-120"/>
-              </a:rPr>
-              <a:t>Usman Akram  •  COMSATS University Islamabad</a:t>
-            </a:r>
-            <a:endParaRPr lang="en-US" sz="900" dirty="0"/>
-          </a:p>
-        </p:txBody>
-      </p:sp>
-      <p:sp>
-        <p:nvSpPr>
-          <p:cNvPr id="26" name="Text 24"/>
-          <p:cNvSpPr txBox="1"/>
-          <p:nvPr/>
-        </p:nvSpPr>
-        <p:spPr>
-          <a:xfrm>
-            <a:off x="11155680" y="6446520"/>
-            <a:ext cx="457200" cy="292608"/>
-          </a:xfrm>
-          <a:prstGeom prst="rect">
-            <a:avLst/>
-          </a:prstGeom>
-          <a:noFill/>
-          <a:ln/>
-        </p:spPr>
-        <p:txBody>
-          <a:bodyPr wrap="square" lIns="0" tIns="0" rIns="0" bIns="0" rtlCol="0" anchor="ctr"/>
-          <a:lstStyle/>
-          <a:p>
-            <a:pPr algn="r" indent="0" marL="0">
-              <a:buNone/>
-            </a:pPr>
-            <a:r>
-              <a:rPr lang="en-US" sz="900" dirty="0">
-                <a:solidFill>
-                  <a:srgbClr val="9AA3D8"/>
-                </a:solidFill>
-                <a:latin typeface="Calibri" pitchFamily="34" charset="0"/>
-                <a:ea typeface="Calibri" pitchFamily="34" charset="-122"/>
-                <a:cs typeface="Calibri" pitchFamily="34" charset="-120"/>
-              </a:rPr>
-              <a:t>26</a:t>
-            </a:r>
-            <a:endParaRPr lang="en-US" sz="900" dirty="0"/>
+          <p:cNvPr id="27" name="cuinotes-footer-mark"/>
+          <p:cNvSpPr txBox="1"/>
+          <p:nvPr/>
+        </p:nvSpPr>
+        <p:spPr>
+          <a:xfrm>
+            <a:off x="9951720" y="6455664"/>
+            <a:ext cx="2011680" cy="292608"/>
+          </a:xfrm>
+          <a:prstGeom prst="rect">
+            <a:avLst/>
+          </a:prstGeom>
+          <a:noFill/>
+        </p:spPr>
+        <p:txBody>
+          <a:bodyPr wrap="none" lIns="0" rIns="0" tIns="0" bIns="0">
+            <a:spAutoFit/>
+          </a:bodyPr>
+          <a:lstStyle/>
+          <a:p>
+            <a:pPr algn="r"/>
+            <a:r>
+              <a:rPr sz="1000">
+                <a:solidFill>
+                  <a:srgbClr val="8A939B"/>
+                </a:solidFill>
+                <a:hlinkClick r:id="rId3"/>
+              </a:rPr>
+              <a:t>cuinotes.com</a:t>
+            </a:r>
+            <a:r>
+              <a:rPr sz="1000">
+                <a:solidFill>
+                  <a:srgbClr val="8A939B"/>
+                </a:solidFill>
+              </a:rPr>
+              <a:t>  ·  26</a:t>
+            </a:r>
           </a:p>
         </p:txBody>
       </p:sp>
@@ -11888,6 +11355,10 @@
           </a:solidFill>
           <a:ln/>
         </p:spPr>
+        <p:txBody>
+          <a:bodyPr/>
+          <a:p/>
+        </p:txBody>
       </p:sp>
       <p:sp>
         <p:nvSpPr>
@@ -11986,6 +11457,10 @@
           </a:solidFill>
           <a:ln/>
         </p:spPr>
+        <p:txBody>
+          <a:bodyPr/>
+          <a:p/>
+        </p:txBody>
       </p:sp>
       <p:sp>
         <p:nvSpPr>
@@ -12084,6 +11559,10 @@
           </a:solidFill>
           <a:ln/>
         </p:spPr>
+        <p:txBody>
+          <a:bodyPr/>
+          <a:p/>
+        </p:txBody>
       </p:sp>
       <p:sp>
         <p:nvSpPr>
@@ -12165,79 +11644,44 @@
       </p:sp>
       <p:sp>
         <p:nvSpPr>
-          <p:cNvPr id="13" name="Text 11"/>
-          <p:cNvSpPr txBox="1"/>
-          <p:nvPr/>
-        </p:nvSpPr>
-        <p:spPr>
-          <a:xfrm>
-            <a:off x="640080" y="6446520"/>
-            <a:ext cx="8686800" cy="292608"/>
-          </a:xfrm>
-          <a:prstGeom prst="rect">
-            <a:avLst/>
-          </a:prstGeom>
-          <a:noFill/>
-          <a:ln/>
-        </p:spPr>
-        <p:txBody>
-          <a:bodyPr wrap="square" lIns="0" tIns="0" rIns="0" bIns="0" rtlCol="0" anchor="ctr"/>
-          <a:lstStyle/>
-          <a:p>
-            <a:pPr algn="l" indent="0" marL="0">
-              <a:buNone/>
-            </a:pPr>
-            <a:r>
-              <a:rPr lang="en-US" sz="900" dirty="0">
-                <a:solidFill>
-                  <a:srgbClr val="5D5D72"/>
-                </a:solidFill>
-                <a:latin typeface="Calibri" pitchFamily="34" charset="0"/>
-                <a:ea typeface="Calibri" pitchFamily="34" charset="-122"/>
-                <a:cs typeface="Calibri" pitchFamily="34" charset="-120"/>
-              </a:rPr>
-              <a:t>Usman Akram  •  COMSATS University Islamabad</a:t>
-            </a:r>
-            <a:endParaRPr lang="en-US" sz="900" dirty="0"/>
-          </a:p>
-        </p:txBody>
-      </p:sp>
-      <p:sp>
-        <p:nvSpPr>
-          <p:cNvPr id="14" name="Text 12"/>
-          <p:cNvSpPr txBox="1"/>
-          <p:nvPr/>
-        </p:nvSpPr>
-        <p:spPr>
-          <a:xfrm>
-            <a:off x="11155680" y="6446520"/>
-            <a:ext cx="457200" cy="292608"/>
-          </a:xfrm>
-          <a:prstGeom prst="rect">
-            <a:avLst/>
-          </a:prstGeom>
-          <a:noFill/>
-          <a:ln/>
-        </p:spPr>
-        <p:txBody>
-          <a:bodyPr wrap="square" lIns="0" tIns="0" rIns="0" bIns="0" rtlCol="0" anchor="ctr"/>
-          <a:lstStyle/>
-          <a:p>
-            <a:pPr algn="r" indent="0" marL="0">
-              <a:buNone/>
-            </a:pPr>
-            <a:r>
-              <a:rPr lang="en-US" sz="900" dirty="0">
-                <a:solidFill>
-                  <a:srgbClr val="5D5D72"/>
-                </a:solidFill>
-                <a:latin typeface="Calibri" pitchFamily="34" charset="0"/>
-                <a:ea typeface="Calibri" pitchFamily="34" charset="-122"/>
-                <a:cs typeface="Calibri" pitchFamily="34" charset="-120"/>
-              </a:rPr>
-              <a:t>3</a:t>
-            </a:r>
-            <a:endParaRPr lang="en-US" sz="900" dirty="0"/>
+          <p:cNvPr id="15" name="cuinotes-footer-mark"/>
+          <p:cNvSpPr txBox="1"/>
+          <p:nvPr/>
+        </p:nvSpPr>
+        <p:spPr>
+          <a:xfrm>
+            <a:off x="9951720" y="6455664"/>
+            <a:ext cx="2011680" cy="292608"/>
+          </a:xfrm>
+          <a:prstGeom prst="rect">
+            <a:avLst/>
+          </a:prstGeom>
+          <a:noFill/>
+        </p:spPr>
+        <p:txBody>
+          <a:bodyPr wrap="none" lIns="0" rIns="0" tIns="0" bIns="0">
+            <a:spAutoFit/>
+          </a:bodyPr>
+          <a:lstStyle/>
+          <a:p>
+            <a:pPr algn="r"/>
+            <a:r>
+              <a:rPr sz="1000">
+                <a:solidFill>
+                  <a:srgbClr val="8A939B"/>
+                </a:solidFill>
+                <a:hlinkClick r:id="rId3"/>
+              </a:rPr>
+              <a:t>cuinotes.com</a:t>
+            </a:r>
+            <a:r>
+              <a:rPr sz="1000">
+                <a:solidFill>
+                  <a:srgbClr val="8A939B"/>
+                </a:solidFill>
+              </a:rPr>
+              <a:t>  ·  3</a:t>
+            </a:r>
           </a:p>
         </p:txBody>
       </p:sp>
@@ -12370,6 +11814,10 @@
           </a:solidFill>
           <a:ln/>
         </p:spPr>
+        <p:txBody>
+          <a:bodyPr/>
+          <a:p/>
+        </p:txBody>
       </p:sp>
       <p:sp>
         <p:nvSpPr>
@@ -12468,6 +11916,10 @@
           </a:solidFill>
           <a:ln/>
         </p:spPr>
+        <p:txBody>
+          <a:bodyPr/>
+          <a:p/>
+        </p:txBody>
       </p:sp>
       <p:sp>
         <p:nvSpPr>
@@ -12566,6 +12018,10 @@
           </a:solidFill>
           <a:ln/>
         </p:spPr>
+        <p:txBody>
+          <a:bodyPr/>
+          <a:p/>
+        </p:txBody>
       </p:sp>
       <p:sp>
         <p:nvSpPr>
@@ -12647,79 +12103,44 @@
       </p:sp>
       <p:sp>
         <p:nvSpPr>
-          <p:cNvPr id="13" name="Text 11"/>
-          <p:cNvSpPr txBox="1"/>
-          <p:nvPr/>
-        </p:nvSpPr>
-        <p:spPr>
-          <a:xfrm>
-            <a:off x="640080" y="6446520"/>
-            <a:ext cx="8686800" cy="292608"/>
-          </a:xfrm>
-          <a:prstGeom prst="rect">
-            <a:avLst/>
-          </a:prstGeom>
-          <a:noFill/>
-          <a:ln/>
-        </p:spPr>
-        <p:txBody>
-          <a:bodyPr wrap="square" lIns="0" tIns="0" rIns="0" bIns="0" rtlCol="0" anchor="ctr"/>
-          <a:lstStyle/>
-          <a:p>
-            <a:pPr algn="l" indent="0" marL="0">
-              <a:buNone/>
-            </a:pPr>
-            <a:r>
-              <a:rPr lang="en-US" sz="900" dirty="0">
-                <a:solidFill>
-                  <a:srgbClr val="5D5D72"/>
-                </a:solidFill>
-                <a:latin typeface="Calibri" pitchFamily="34" charset="0"/>
-                <a:ea typeface="Calibri" pitchFamily="34" charset="-122"/>
-                <a:cs typeface="Calibri" pitchFamily="34" charset="-120"/>
-              </a:rPr>
-              <a:t>Usman Akram  •  COMSATS University Islamabad</a:t>
-            </a:r>
-            <a:endParaRPr lang="en-US" sz="900" dirty="0"/>
-          </a:p>
-        </p:txBody>
-      </p:sp>
-      <p:sp>
-        <p:nvSpPr>
-          <p:cNvPr id="14" name="Text 12"/>
-          <p:cNvSpPr txBox="1"/>
-          <p:nvPr/>
-        </p:nvSpPr>
-        <p:spPr>
-          <a:xfrm>
-            <a:off x="11155680" y="6446520"/>
-            <a:ext cx="457200" cy="292608"/>
-          </a:xfrm>
-          <a:prstGeom prst="rect">
-            <a:avLst/>
-          </a:prstGeom>
-          <a:noFill/>
-          <a:ln/>
-        </p:spPr>
-        <p:txBody>
-          <a:bodyPr wrap="square" lIns="0" tIns="0" rIns="0" bIns="0" rtlCol="0" anchor="ctr"/>
-          <a:lstStyle/>
-          <a:p>
-            <a:pPr algn="r" indent="0" marL="0">
-              <a:buNone/>
-            </a:pPr>
-            <a:r>
-              <a:rPr lang="en-US" sz="900" dirty="0">
-                <a:solidFill>
-                  <a:srgbClr val="5D5D72"/>
-                </a:solidFill>
-                <a:latin typeface="Calibri" pitchFamily="34" charset="0"/>
-                <a:ea typeface="Calibri" pitchFamily="34" charset="-122"/>
-                <a:cs typeface="Calibri" pitchFamily="34" charset="-120"/>
-              </a:rPr>
-              <a:t>4</a:t>
-            </a:r>
-            <a:endParaRPr lang="en-US" sz="900" dirty="0"/>
+          <p:cNvPr id="15" name="cuinotes-footer-mark"/>
+          <p:cNvSpPr txBox="1"/>
+          <p:nvPr/>
+        </p:nvSpPr>
+        <p:spPr>
+          <a:xfrm>
+            <a:off x="9951720" y="6455664"/>
+            <a:ext cx="2011680" cy="292608"/>
+          </a:xfrm>
+          <a:prstGeom prst="rect">
+            <a:avLst/>
+          </a:prstGeom>
+          <a:noFill/>
+        </p:spPr>
+        <p:txBody>
+          <a:bodyPr wrap="none" lIns="0" rIns="0" tIns="0" bIns="0">
+            <a:spAutoFit/>
+          </a:bodyPr>
+          <a:lstStyle/>
+          <a:p>
+            <a:pPr algn="r"/>
+            <a:r>
+              <a:rPr sz="1000">
+                <a:solidFill>
+                  <a:srgbClr val="8A939B"/>
+                </a:solidFill>
+                <a:hlinkClick r:id="rId3"/>
+              </a:rPr>
+              <a:t>cuinotes.com</a:t>
+            </a:r>
+            <a:r>
+              <a:rPr sz="1000">
+                <a:solidFill>
+                  <a:srgbClr val="8A939B"/>
+                </a:solidFill>
+              </a:rPr>
+              <a:t>  ·  4</a:t>
+            </a:r>
           </a:p>
         </p:txBody>
       </p:sp>
@@ -12856,6 +12277,10 @@
             <a:tailEnd type="triangle"/>
           </a:ln>
         </p:spPr>
+        <p:txBody>
+          <a:bodyPr/>
+          <a:p/>
+        </p:txBody>
       </p:sp>
       <p:sp>
         <p:nvSpPr>
@@ -12880,6 +12305,10 @@
             <a:tailEnd type="triangle"/>
           </a:ln>
         </p:spPr>
+        <p:txBody>
+          <a:bodyPr/>
+          <a:p/>
+        </p:txBody>
       </p:sp>
       <p:sp>
         <p:nvSpPr>
@@ -12904,6 +12333,10 @@
             <a:tailEnd type="triangle"/>
           </a:ln>
         </p:spPr>
+        <p:txBody>
+          <a:bodyPr/>
+          <a:p/>
+        </p:txBody>
       </p:sp>
       <p:sp>
         <p:nvSpPr>
@@ -12928,6 +12361,10 @@
             <a:tailEnd type="triangle"/>
           </a:ln>
         </p:spPr>
+        <p:txBody>
+          <a:bodyPr/>
+          <a:p/>
+        </p:txBody>
       </p:sp>
       <p:sp>
         <p:nvSpPr>
@@ -12952,6 +12389,10 @@
             <a:tailEnd type="triangle"/>
           </a:ln>
         </p:spPr>
+        <p:txBody>
+          <a:bodyPr/>
+          <a:p/>
+        </p:txBody>
       </p:sp>
       <p:sp>
         <p:nvSpPr>
@@ -13017,6 +12458,10 @@
             <a:tailEnd type="triangle"/>
           </a:ln>
         </p:spPr>
+        <p:txBody>
+          <a:bodyPr/>
+          <a:p/>
+        </p:txBody>
       </p:sp>
       <p:sp>
         <p:nvSpPr>
@@ -13041,6 +12486,10 @@
             <a:tailEnd type="triangle"/>
           </a:ln>
         </p:spPr>
+        <p:txBody>
+          <a:bodyPr/>
+          <a:p/>
+        </p:txBody>
       </p:sp>
       <p:sp>
         <p:nvSpPr>
@@ -13061,6 +12510,10 @@
           </a:solidFill>
           <a:ln/>
         </p:spPr>
+        <p:txBody>
+          <a:bodyPr/>
+          <a:p/>
+        </p:txBody>
       </p:sp>
       <p:sp>
         <p:nvSpPr>
@@ -13143,6 +12596,10 @@
           </a:solidFill>
           <a:ln/>
         </p:spPr>
+        <p:txBody>
+          <a:bodyPr/>
+          <a:p/>
+        </p:txBody>
       </p:sp>
       <p:sp>
         <p:nvSpPr>
@@ -13225,6 +12682,10 @@
           </a:solidFill>
           <a:ln/>
         </p:spPr>
+        <p:txBody>
+          <a:bodyPr/>
+          <a:p/>
+        </p:txBody>
       </p:sp>
       <p:sp>
         <p:nvSpPr>
@@ -13307,6 +12768,10 @@
           </a:solidFill>
           <a:ln/>
         </p:spPr>
+        <p:txBody>
+          <a:bodyPr/>
+          <a:p/>
+        </p:txBody>
       </p:sp>
       <p:sp>
         <p:nvSpPr>
@@ -13389,6 +12854,10 @@
           </a:solidFill>
           <a:ln/>
         </p:spPr>
+        <p:txBody>
+          <a:bodyPr/>
+          <a:p/>
+        </p:txBody>
       </p:sp>
       <p:sp>
         <p:nvSpPr>
@@ -13471,6 +12940,10 @@
           </a:solidFill>
           <a:ln/>
         </p:spPr>
+        <p:txBody>
+          <a:bodyPr/>
+          <a:p/>
+        </p:txBody>
       </p:sp>
       <p:sp>
         <p:nvSpPr>
@@ -13575,79 +13048,44 @@
       </p:sp>
       <p:sp>
         <p:nvSpPr>
-          <p:cNvPr id="25" name="Text 23"/>
-          <p:cNvSpPr txBox="1"/>
-          <p:nvPr/>
-        </p:nvSpPr>
-        <p:spPr>
-          <a:xfrm>
-            <a:off x="640080" y="6446520"/>
-            <a:ext cx="8686800" cy="292608"/>
-          </a:xfrm>
-          <a:prstGeom prst="rect">
-            <a:avLst/>
-          </a:prstGeom>
-          <a:noFill/>
-          <a:ln/>
-        </p:spPr>
-        <p:txBody>
-          <a:bodyPr wrap="square" lIns="0" tIns="0" rIns="0" bIns="0" rtlCol="0" anchor="ctr"/>
-          <a:lstStyle/>
-          <a:p>
-            <a:pPr algn="l" indent="0" marL="0">
-              <a:buNone/>
-            </a:pPr>
-            <a:r>
-              <a:rPr lang="en-US" sz="900" dirty="0">
-                <a:solidFill>
-                  <a:srgbClr val="5D5D72"/>
-                </a:solidFill>
-                <a:latin typeface="Calibri" pitchFamily="34" charset="0"/>
-                <a:ea typeface="Calibri" pitchFamily="34" charset="-122"/>
-                <a:cs typeface="Calibri" pitchFamily="34" charset="-120"/>
-              </a:rPr>
-              <a:t>Usman Akram  •  COMSATS University Islamabad</a:t>
-            </a:r>
-            <a:endParaRPr lang="en-US" sz="900" dirty="0"/>
-          </a:p>
-        </p:txBody>
-      </p:sp>
-      <p:sp>
-        <p:nvSpPr>
-          <p:cNvPr id="26" name="Text 24"/>
-          <p:cNvSpPr txBox="1"/>
-          <p:nvPr/>
-        </p:nvSpPr>
-        <p:spPr>
-          <a:xfrm>
-            <a:off x="11155680" y="6446520"/>
-            <a:ext cx="457200" cy="292608"/>
-          </a:xfrm>
-          <a:prstGeom prst="rect">
-            <a:avLst/>
-          </a:prstGeom>
-          <a:noFill/>
-          <a:ln/>
-        </p:spPr>
-        <p:txBody>
-          <a:bodyPr wrap="square" lIns="0" tIns="0" rIns="0" bIns="0" rtlCol="0" anchor="ctr"/>
-          <a:lstStyle/>
-          <a:p>
-            <a:pPr algn="r" indent="0" marL="0">
-              <a:buNone/>
-            </a:pPr>
-            <a:r>
-              <a:rPr lang="en-US" sz="900" dirty="0">
-                <a:solidFill>
-                  <a:srgbClr val="5D5D72"/>
-                </a:solidFill>
-                <a:latin typeface="Calibri" pitchFamily="34" charset="0"/>
-                <a:ea typeface="Calibri" pitchFamily="34" charset="-122"/>
-                <a:cs typeface="Calibri" pitchFamily="34" charset="-120"/>
-              </a:rPr>
-              <a:t>5</a:t>
-            </a:r>
-            <a:endParaRPr lang="en-US" sz="900" dirty="0"/>
+          <p:cNvPr id="27" name="cuinotes-footer-mark"/>
+          <p:cNvSpPr txBox="1"/>
+          <p:nvPr/>
+        </p:nvSpPr>
+        <p:spPr>
+          <a:xfrm>
+            <a:off x="9951720" y="6455664"/>
+            <a:ext cx="2011680" cy="292608"/>
+          </a:xfrm>
+          <a:prstGeom prst="rect">
+            <a:avLst/>
+          </a:prstGeom>
+          <a:noFill/>
+        </p:spPr>
+        <p:txBody>
+          <a:bodyPr wrap="none" lIns="0" rIns="0" tIns="0" bIns="0">
+            <a:spAutoFit/>
+          </a:bodyPr>
+          <a:lstStyle/>
+          <a:p>
+            <a:pPr algn="r"/>
+            <a:r>
+              <a:rPr sz="1000">
+                <a:solidFill>
+                  <a:srgbClr val="8A939B"/>
+                </a:solidFill>
+                <a:hlinkClick r:id="rId3"/>
+              </a:rPr>
+              <a:t>cuinotes.com</a:t>
+            </a:r>
+            <a:r>
+              <a:rPr sz="1000">
+                <a:solidFill>
+                  <a:srgbClr val="8A939B"/>
+                </a:solidFill>
+              </a:rPr>
+              <a:t>  ·  5</a:t>
+            </a:r>
           </a:p>
         </p:txBody>
       </p:sp>
@@ -13782,6 +13220,10 @@
           </a:solidFill>
           <a:ln/>
         </p:spPr>
+        <p:txBody>
+          <a:bodyPr/>
+          <a:p/>
+        </p:txBody>
       </p:sp>
       <p:sp>
         <p:nvSpPr>
@@ -13946,79 +13388,44 @@
       </p:sp>
       <p:sp>
         <p:nvSpPr>
-          <p:cNvPr id="7" name="Text 5"/>
-          <p:cNvSpPr txBox="1"/>
-          <p:nvPr/>
-        </p:nvSpPr>
-        <p:spPr>
-          <a:xfrm>
-            <a:off x="640080" y="6446520"/>
-            <a:ext cx="8686800" cy="292608"/>
-          </a:xfrm>
-          <a:prstGeom prst="rect">
-            <a:avLst/>
-          </a:prstGeom>
-          <a:noFill/>
-          <a:ln/>
-        </p:spPr>
-        <p:txBody>
-          <a:bodyPr wrap="square" lIns="0" tIns="0" rIns="0" bIns="0" rtlCol="0" anchor="ctr"/>
-          <a:lstStyle/>
-          <a:p>
-            <a:pPr algn="l" indent="0" marL="0">
-              <a:buNone/>
-            </a:pPr>
-            <a:r>
-              <a:rPr lang="en-US" sz="900" dirty="0">
-                <a:solidFill>
-                  <a:srgbClr val="5D5D72"/>
-                </a:solidFill>
-                <a:latin typeface="Calibri" pitchFamily="34" charset="0"/>
-                <a:ea typeface="Calibri" pitchFamily="34" charset="-122"/>
-                <a:cs typeface="Calibri" pitchFamily="34" charset="-120"/>
-              </a:rPr>
-              <a:t>Usman Akram  •  COMSATS University Islamabad</a:t>
-            </a:r>
-            <a:endParaRPr lang="en-US" sz="900" dirty="0"/>
-          </a:p>
-        </p:txBody>
-      </p:sp>
-      <p:sp>
-        <p:nvSpPr>
-          <p:cNvPr id="8" name="Text 6"/>
-          <p:cNvSpPr txBox="1"/>
-          <p:nvPr/>
-        </p:nvSpPr>
-        <p:spPr>
-          <a:xfrm>
-            <a:off x="11155680" y="6446520"/>
-            <a:ext cx="457200" cy="292608"/>
-          </a:xfrm>
-          <a:prstGeom prst="rect">
-            <a:avLst/>
-          </a:prstGeom>
-          <a:noFill/>
-          <a:ln/>
-        </p:spPr>
-        <p:txBody>
-          <a:bodyPr wrap="square" lIns="0" tIns="0" rIns="0" bIns="0" rtlCol="0" anchor="ctr"/>
-          <a:lstStyle/>
-          <a:p>
-            <a:pPr algn="r" indent="0" marL="0">
-              <a:buNone/>
-            </a:pPr>
-            <a:r>
-              <a:rPr lang="en-US" sz="900" dirty="0">
-                <a:solidFill>
-                  <a:srgbClr val="5D5D72"/>
-                </a:solidFill>
-                <a:latin typeface="Calibri" pitchFamily="34" charset="0"/>
-                <a:ea typeface="Calibri" pitchFamily="34" charset="-122"/>
-                <a:cs typeface="Calibri" pitchFamily="34" charset="-120"/>
-              </a:rPr>
-              <a:t>6</a:t>
-            </a:r>
-            <a:endParaRPr lang="en-US" sz="900" dirty="0"/>
+          <p:cNvPr id="9" name="cuinotes-footer-mark"/>
+          <p:cNvSpPr txBox="1"/>
+          <p:nvPr/>
+        </p:nvSpPr>
+        <p:spPr>
+          <a:xfrm>
+            <a:off x="9951720" y="6455664"/>
+            <a:ext cx="2011680" cy="292608"/>
+          </a:xfrm>
+          <a:prstGeom prst="rect">
+            <a:avLst/>
+          </a:prstGeom>
+          <a:noFill/>
+        </p:spPr>
+        <p:txBody>
+          <a:bodyPr wrap="none" lIns="0" rIns="0" tIns="0" bIns="0">
+            <a:spAutoFit/>
+          </a:bodyPr>
+          <a:lstStyle/>
+          <a:p>
+            <a:pPr algn="r"/>
+            <a:r>
+              <a:rPr sz="1000">
+                <a:solidFill>
+                  <a:srgbClr val="8A939B"/>
+                </a:solidFill>
+                <a:hlinkClick r:id="rId3"/>
+              </a:rPr>
+              <a:t>cuinotes.com</a:t>
+            </a:r>
+            <a:r>
+              <a:rPr sz="1000">
+                <a:solidFill>
+                  <a:srgbClr val="8A939B"/>
+                </a:solidFill>
+              </a:rPr>
+              <a:t>  ·  6</a:t>
+            </a:r>
           </a:p>
         </p:txBody>
       </p:sp>
@@ -14158,6 +13565,10 @@
             <a:prstDash val="solid"/>
           </a:ln>
         </p:spPr>
+        <p:txBody>
+          <a:bodyPr/>
+          <a:p/>
+        </p:txBody>
       </p:sp>
       <p:sp>
         <p:nvSpPr>
@@ -14239,79 +13650,44 @@
       </p:sp>
       <p:sp>
         <p:nvSpPr>
-          <p:cNvPr id="7" name="Text 5"/>
-          <p:cNvSpPr txBox="1"/>
-          <p:nvPr/>
-        </p:nvSpPr>
-        <p:spPr>
-          <a:xfrm>
-            <a:off x="640080" y="6446520"/>
-            <a:ext cx="8686800" cy="292608"/>
-          </a:xfrm>
-          <a:prstGeom prst="rect">
-            <a:avLst/>
-          </a:prstGeom>
-          <a:noFill/>
-          <a:ln/>
-        </p:spPr>
-        <p:txBody>
-          <a:bodyPr wrap="square" lIns="0" tIns="0" rIns="0" bIns="0" rtlCol="0" anchor="ctr"/>
-          <a:lstStyle/>
-          <a:p>
-            <a:pPr algn="l" indent="0" marL="0">
-              <a:buNone/>
-            </a:pPr>
-            <a:r>
-              <a:rPr lang="en-US" sz="900" dirty="0">
-                <a:solidFill>
-                  <a:srgbClr val="5D5D72"/>
-                </a:solidFill>
-                <a:latin typeface="Calibri" pitchFamily="34" charset="0"/>
-                <a:ea typeface="Calibri" pitchFamily="34" charset="-122"/>
-                <a:cs typeface="Calibri" pitchFamily="34" charset="-120"/>
-              </a:rPr>
-              <a:t>Usman Akram  •  COMSATS University Islamabad</a:t>
-            </a:r>
-            <a:endParaRPr lang="en-US" sz="900" dirty="0"/>
-          </a:p>
-        </p:txBody>
-      </p:sp>
-      <p:sp>
-        <p:nvSpPr>
-          <p:cNvPr id="8" name="Text 6"/>
-          <p:cNvSpPr txBox="1"/>
-          <p:nvPr/>
-        </p:nvSpPr>
-        <p:spPr>
-          <a:xfrm>
-            <a:off x="11155680" y="6446520"/>
-            <a:ext cx="457200" cy="292608"/>
-          </a:xfrm>
-          <a:prstGeom prst="rect">
-            <a:avLst/>
-          </a:prstGeom>
-          <a:noFill/>
-          <a:ln/>
-        </p:spPr>
-        <p:txBody>
-          <a:bodyPr wrap="square" lIns="0" tIns="0" rIns="0" bIns="0" rtlCol="0" anchor="ctr"/>
-          <a:lstStyle/>
-          <a:p>
-            <a:pPr algn="r" indent="0" marL="0">
-              <a:buNone/>
-            </a:pPr>
-            <a:r>
-              <a:rPr lang="en-US" sz="900" dirty="0">
-                <a:solidFill>
-                  <a:srgbClr val="5D5D72"/>
-                </a:solidFill>
-                <a:latin typeface="Calibri" pitchFamily="34" charset="0"/>
-                <a:ea typeface="Calibri" pitchFamily="34" charset="-122"/>
-                <a:cs typeface="Calibri" pitchFamily="34" charset="-120"/>
-              </a:rPr>
-              <a:t>7</a:t>
-            </a:r>
-            <a:endParaRPr lang="en-US" sz="900" dirty="0"/>
+          <p:cNvPr id="9" name="cuinotes-footer-mark"/>
+          <p:cNvSpPr txBox="1"/>
+          <p:nvPr/>
+        </p:nvSpPr>
+        <p:spPr>
+          <a:xfrm>
+            <a:off x="9951720" y="6455664"/>
+            <a:ext cx="2011680" cy="292608"/>
+          </a:xfrm>
+          <a:prstGeom prst="rect">
+            <a:avLst/>
+          </a:prstGeom>
+          <a:noFill/>
+        </p:spPr>
+        <p:txBody>
+          <a:bodyPr wrap="none" lIns="0" rIns="0" tIns="0" bIns="0">
+            <a:spAutoFit/>
+          </a:bodyPr>
+          <a:lstStyle/>
+          <a:p>
+            <a:pPr algn="r"/>
+            <a:r>
+              <a:rPr sz="1000">
+                <a:solidFill>
+                  <a:srgbClr val="8A939B"/>
+                </a:solidFill>
+                <a:hlinkClick r:id="rId3"/>
+              </a:rPr>
+              <a:t>cuinotes.com</a:t>
+            </a:r>
+            <a:r>
+              <a:rPr sz="1000">
+                <a:solidFill>
+                  <a:srgbClr val="8A939B"/>
+                </a:solidFill>
+              </a:rPr>
+              <a:t>  ·  7</a:t>
+            </a:r>
           </a:p>
         </p:txBody>
       </p:sp>
@@ -14446,6 +13822,10 @@
           </a:solidFill>
           <a:ln/>
         </p:spPr>
+        <p:txBody>
+          <a:bodyPr/>
+          <a:p/>
+        </p:txBody>
       </p:sp>
       <p:sp>
         <p:nvSpPr>
@@ -14737,79 +14117,44 @@
       </p:sp>
       <p:sp>
         <p:nvSpPr>
-          <p:cNvPr id="7" name="Text 5"/>
-          <p:cNvSpPr txBox="1"/>
-          <p:nvPr/>
-        </p:nvSpPr>
-        <p:spPr>
-          <a:xfrm>
-            <a:off x="640080" y="6446520"/>
-            <a:ext cx="8686800" cy="292608"/>
-          </a:xfrm>
-          <a:prstGeom prst="rect">
-            <a:avLst/>
-          </a:prstGeom>
-          <a:noFill/>
-          <a:ln/>
-        </p:spPr>
-        <p:txBody>
-          <a:bodyPr wrap="square" lIns="0" tIns="0" rIns="0" bIns="0" rtlCol="0" anchor="ctr"/>
-          <a:lstStyle/>
-          <a:p>
-            <a:pPr algn="l" indent="0" marL="0">
-              <a:buNone/>
-            </a:pPr>
-            <a:r>
-              <a:rPr lang="en-US" sz="900" dirty="0">
-                <a:solidFill>
-                  <a:srgbClr val="5D5D72"/>
-                </a:solidFill>
-                <a:latin typeface="Calibri" pitchFamily="34" charset="0"/>
-                <a:ea typeface="Calibri" pitchFamily="34" charset="-122"/>
-                <a:cs typeface="Calibri" pitchFamily="34" charset="-120"/>
-              </a:rPr>
-              <a:t>Usman Akram  •  COMSATS University Islamabad</a:t>
-            </a:r>
-            <a:endParaRPr lang="en-US" sz="900" dirty="0"/>
-          </a:p>
-        </p:txBody>
-      </p:sp>
-      <p:sp>
-        <p:nvSpPr>
-          <p:cNvPr id="8" name="Text 6"/>
-          <p:cNvSpPr txBox="1"/>
-          <p:nvPr/>
-        </p:nvSpPr>
-        <p:spPr>
-          <a:xfrm>
-            <a:off x="11155680" y="6446520"/>
-            <a:ext cx="457200" cy="292608"/>
-          </a:xfrm>
-          <a:prstGeom prst="rect">
-            <a:avLst/>
-          </a:prstGeom>
-          <a:noFill/>
-          <a:ln/>
-        </p:spPr>
-        <p:txBody>
-          <a:bodyPr wrap="square" lIns="0" tIns="0" rIns="0" bIns="0" rtlCol="0" anchor="ctr"/>
-          <a:lstStyle/>
-          <a:p>
-            <a:pPr algn="r" indent="0" marL="0">
-              <a:buNone/>
-            </a:pPr>
-            <a:r>
-              <a:rPr lang="en-US" sz="900" dirty="0">
-                <a:solidFill>
-                  <a:srgbClr val="5D5D72"/>
-                </a:solidFill>
-                <a:latin typeface="Calibri" pitchFamily="34" charset="0"/>
-                <a:ea typeface="Calibri" pitchFamily="34" charset="-122"/>
-                <a:cs typeface="Calibri" pitchFamily="34" charset="-120"/>
-              </a:rPr>
-              <a:t>8</a:t>
-            </a:r>
-            <a:endParaRPr lang="en-US" sz="900" dirty="0"/>
+          <p:cNvPr id="9" name="cuinotes-footer-mark"/>
+          <p:cNvSpPr txBox="1"/>
+          <p:nvPr/>
+        </p:nvSpPr>
+        <p:spPr>
+          <a:xfrm>
+            <a:off x="9951720" y="6455664"/>
+            <a:ext cx="2011680" cy="292608"/>
+          </a:xfrm>
+          <a:prstGeom prst="rect">
+            <a:avLst/>
+          </a:prstGeom>
+          <a:noFill/>
+        </p:spPr>
+        <p:txBody>
+          <a:bodyPr wrap="none" lIns="0" rIns="0" tIns="0" bIns="0">
+            <a:spAutoFit/>
+          </a:bodyPr>
+          <a:lstStyle/>
+          <a:p>
+            <a:pPr algn="r"/>
+            <a:r>
+              <a:rPr sz="1000">
+                <a:solidFill>
+                  <a:srgbClr val="8A939B"/>
+                </a:solidFill>
+                <a:hlinkClick r:id="rId3"/>
+              </a:rPr>
+              <a:t>cuinotes.com</a:t>
+            </a:r>
+            <a:r>
+              <a:rPr sz="1000">
+                <a:solidFill>
+                  <a:srgbClr val="8A939B"/>
+                </a:solidFill>
+              </a:rPr>
+              <a:t>  ·  8</a:t>
+            </a:r>
           </a:p>
         </p:txBody>
       </p:sp>
@@ -14949,6 +14294,10 @@
             <a:prstDash val="solid"/>
           </a:ln>
         </p:spPr>
+        <p:txBody>
+          <a:bodyPr/>
+          <a:p/>
+        </p:txBody>
       </p:sp>
       <p:sp>
         <p:nvSpPr>
@@ -15030,79 +14379,44 @@
       </p:sp>
       <p:sp>
         <p:nvSpPr>
-          <p:cNvPr id="7" name="Text 5"/>
-          <p:cNvSpPr txBox="1"/>
-          <p:nvPr/>
-        </p:nvSpPr>
-        <p:spPr>
-          <a:xfrm>
-            <a:off x="640080" y="6446520"/>
-            <a:ext cx="8686800" cy="292608"/>
-          </a:xfrm>
-          <a:prstGeom prst="rect">
-            <a:avLst/>
-          </a:prstGeom>
-          <a:noFill/>
-          <a:ln/>
-        </p:spPr>
-        <p:txBody>
-          <a:bodyPr wrap="square" lIns="0" tIns="0" rIns="0" bIns="0" rtlCol="0" anchor="ctr"/>
-          <a:lstStyle/>
-          <a:p>
-            <a:pPr algn="l" indent="0" marL="0">
-              <a:buNone/>
-            </a:pPr>
-            <a:r>
-              <a:rPr lang="en-US" sz="900" dirty="0">
-                <a:solidFill>
-                  <a:srgbClr val="5D5D72"/>
-                </a:solidFill>
-                <a:latin typeface="Calibri" pitchFamily="34" charset="0"/>
-                <a:ea typeface="Calibri" pitchFamily="34" charset="-122"/>
-                <a:cs typeface="Calibri" pitchFamily="34" charset="-120"/>
-              </a:rPr>
-              <a:t>Usman Akram  •  COMSATS University Islamabad</a:t>
-            </a:r>
-            <a:endParaRPr lang="en-US" sz="900" dirty="0"/>
-          </a:p>
-        </p:txBody>
-      </p:sp>
-      <p:sp>
-        <p:nvSpPr>
-          <p:cNvPr id="8" name="Text 6"/>
-          <p:cNvSpPr txBox="1"/>
-          <p:nvPr/>
-        </p:nvSpPr>
-        <p:spPr>
-          <a:xfrm>
-            <a:off x="11155680" y="6446520"/>
-            <a:ext cx="457200" cy="292608"/>
-          </a:xfrm>
-          <a:prstGeom prst="rect">
-            <a:avLst/>
-          </a:prstGeom>
-          <a:noFill/>
-          <a:ln/>
-        </p:spPr>
-        <p:txBody>
-          <a:bodyPr wrap="square" lIns="0" tIns="0" rIns="0" bIns="0" rtlCol="0" anchor="ctr"/>
-          <a:lstStyle/>
-          <a:p>
-            <a:pPr algn="r" indent="0" marL="0">
-              <a:buNone/>
-            </a:pPr>
-            <a:r>
-              <a:rPr lang="en-US" sz="900" dirty="0">
-                <a:solidFill>
-                  <a:srgbClr val="5D5D72"/>
-                </a:solidFill>
-                <a:latin typeface="Calibri" pitchFamily="34" charset="0"/>
-                <a:ea typeface="Calibri" pitchFamily="34" charset="-122"/>
-                <a:cs typeface="Calibri" pitchFamily="34" charset="-120"/>
-              </a:rPr>
-              <a:t>9</a:t>
-            </a:r>
-            <a:endParaRPr lang="en-US" sz="900" dirty="0"/>
+          <p:cNvPr id="9" name="cuinotes-footer-mark"/>
+          <p:cNvSpPr txBox="1"/>
+          <p:nvPr/>
+        </p:nvSpPr>
+        <p:spPr>
+          <a:xfrm>
+            <a:off x="9951720" y="6455664"/>
+            <a:ext cx="2011680" cy="292608"/>
+          </a:xfrm>
+          <a:prstGeom prst="rect">
+            <a:avLst/>
+          </a:prstGeom>
+          <a:noFill/>
+        </p:spPr>
+        <p:txBody>
+          <a:bodyPr wrap="none" lIns="0" rIns="0" tIns="0" bIns="0">
+            <a:spAutoFit/>
+          </a:bodyPr>
+          <a:lstStyle/>
+          <a:p>
+            <a:pPr algn="r"/>
+            <a:r>
+              <a:rPr sz="1000">
+                <a:solidFill>
+                  <a:srgbClr val="8A939B"/>
+                </a:solidFill>
+                <a:hlinkClick r:id="rId3"/>
+              </a:rPr>
+              <a:t>cuinotes.com</a:t>
+            </a:r>
+            <a:r>
+              <a:rPr sz="1000">
+                <a:solidFill>
+                  <a:srgbClr val="8A939B"/>
+                </a:solidFill>
+              </a:rPr>
+              <a:t>  ·  9</a:t>
+            </a:r>
           </a:p>
         </p:txBody>
       </p:sp>

--- a/slides/CSC336-Lecture-21-Middleware.pptx
+++ b/slides/CSC336-Lecture-21-Middleware.pptx
@@ -3429,9 +3429,13 @@
             </a:avLst>
           </a:prstGeom>
           <a:solidFill>
-            <a:srgbClr val="1E1E4C"/>
+            <a:srgbClr val="F7F8F9"/>
           </a:solidFill>
-          <a:ln/>
+          <a:ln w="9525">
+            <a:solidFill>
+              <a:srgbClr val="D0D5DD"/>
+            </a:solidFill>
+          </a:ln>
         </p:spPr>
         <p:txBody>
           <a:bodyPr/>
@@ -3468,7 +3472,7 @@
             <a:r>
               <a:rPr lang="en-US" sz="1000" dirty="0">
                 <a:solidFill>
-                  <a:srgbClr val="C9D3F5"/>
+                  <a:srgbClr val="1F2429"/>
                 </a:solidFill>
                 <a:latin typeface="Courier New" pitchFamily="34" charset="0"/>
                 <a:ea typeface="Courier New" pitchFamily="34" charset="-122"/>
@@ -3488,7 +3492,7 @@
             <a:r>
               <a:rPr lang="en-US" sz="1000" dirty="0">
                 <a:solidFill>
-                  <a:srgbClr val="C9D3F5"/>
+                  <a:srgbClr val="1F2429"/>
                 </a:solidFill>
                 <a:latin typeface="Courier New" pitchFamily="34" charset="0"/>
                 <a:ea typeface="Courier New" pitchFamily="34" charset="-122"/>
@@ -3508,7 +3512,7 @@
             <a:r>
               <a:rPr lang="en-US" sz="1000" dirty="0">
                 <a:solidFill>
-                  <a:srgbClr val="C9D3F5"/>
+                  <a:srgbClr val="1F2429"/>
                 </a:solidFill>
                 <a:latin typeface="Courier New" pitchFamily="34" charset="0"/>
                 <a:ea typeface="Courier New" pitchFamily="34" charset="-122"/>
@@ -3528,7 +3532,7 @@
             <a:r>
               <a:rPr lang="en-US" sz="1000" dirty="0">
                 <a:solidFill>
-                  <a:srgbClr val="C9D3F5"/>
+                  <a:srgbClr val="1F2429"/>
                 </a:solidFill>
                 <a:latin typeface="Courier New" pitchFamily="34" charset="0"/>
                 <a:ea typeface="Courier New" pitchFamily="34" charset="-122"/>
@@ -3557,7 +3561,7 @@
             <a:r>
               <a:rPr lang="en-US" sz="1000" dirty="0">
                 <a:solidFill>
-                  <a:srgbClr val="C9D3F5"/>
+                  <a:srgbClr val="1F2429"/>
                 </a:solidFill>
                 <a:latin typeface="Courier New" pitchFamily="34" charset="0"/>
                 <a:ea typeface="Courier New" pitchFamily="34" charset="-122"/>
@@ -3577,7 +3581,7 @@
             <a:r>
               <a:rPr lang="en-US" sz="1000" dirty="0">
                 <a:solidFill>
-                  <a:srgbClr val="C9D3F5"/>
+                  <a:srgbClr val="1F2429"/>
                 </a:solidFill>
                 <a:latin typeface="Courier New" pitchFamily="34" charset="0"/>
                 <a:ea typeface="Courier New" pitchFamily="34" charset="-122"/>
@@ -3597,7 +3601,7 @@
             <a:r>
               <a:rPr lang="en-US" sz="1000" dirty="0">
                 <a:solidFill>
-                  <a:srgbClr val="C9D3F5"/>
+                  <a:srgbClr val="1F2429"/>
                 </a:solidFill>
                 <a:latin typeface="Courier New" pitchFamily="34" charset="0"/>
                 <a:ea typeface="Courier New" pitchFamily="34" charset="-122"/>
@@ -3617,7 +3621,7 @@
             <a:r>
               <a:rPr lang="en-US" sz="1000" dirty="0">
                 <a:solidFill>
-                  <a:srgbClr val="C9D3F5"/>
+                  <a:srgbClr val="1F2429"/>
                 </a:solidFill>
                 <a:latin typeface="Courier New" pitchFamily="34" charset="0"/>
                 <a:ea typeface="Courier New" pitchFamily="34" charset="-122"/>
@@ -3646,7 +3650,7 @@
             <a:r>
               <a:rPr lang="en-US" sz="1000" dirty="0">
                 <a:solidFill>
-                  <a:srgbClr val="C9D3F5"/>
+                  <a:srgbClr val="1F2429"/>
                 </a:solidFill>
                 <a:latin typeface="Courier New" pitchFamily="34" charset="0"/>
                 <a:ea typeface="Courier New" pitchFamily="34" charset="-122"/>
@@ -3666,7 +3670,7 @@
             <a:r>
               <a:rPr lang="en-US" sz="1000" dirty="0">
                 <a:solidFill>
-                  <a:srgbClr val="C9D3F5"/>
+                  <a:srgbClr val="1F2429"/>
                 </a:solidFill>
                 <a:latin typeface="Courier New" pitchFamily="34" charset="0"/>
                 <a:ea typeface="Courier New" pitchFamily="34" charset="-122"/>
@@ -3686,7 +3690,7 @@
             <a:r>
               <a:rPr lang="en-US" sz="1000" dirty="0">
                 <a:solidFill>
-                  <a:srgbClr val="C9D3F5"/>
+                  <a:srgbClr val="1F2429"/>
                 </a:solidFill>
                 <a:latin typeface="Courier New" pitchFamily="34" charset="0"/>
                 <a:ea typeface="Courier New" pitchFamily="34" charset="-122"/>
@@ -3706,7 +3710,7 @@
             <a:r>
               <a:rPr lang="en-US" sz="1000" dirty="0">
                 <a:solidFill>
-                  <a:srgbClr val="C9D3F5"/>
+                  <a:srgbClr val="1F2429"/>
                 </a:solidFill>
                 <a:latin typeface="Courier New" pitchFamily="34" charset="0"/>
                 <a:ea typeface="Courier New" pitchFamily="34" charset="-122"/>
@@ -3726,7 +3730,7 @@
             <a:r>
               <a:rPr lang="en-US" sz="1000" dirty="0">
                 <a:solidFill>
-                  <a:srgbClr val="C9D3F5"/>
+                  <a:srgbClr val="1F2429"/>
                 </a:solidFill>
                 <a:latin typeface="Courier New" pitchFamily="34" charset="0"/>
                 <a:ea typeface="Courier New" pitchFamily="34" charset="-122"/>
@@ -3947,9 +3951,13 @@
             </a:avLst>
           </a:prstGeom>
           <a:solidFill>
-            <a:srgbClr val="1E1E4C"/>
+            <a:srgbClr val="F7F8F9"/>
           </a:solidFill>
-          <a:ln/>
+          <a:ln w="9525">
+            <a:solidFill>
+              <a:srgbClr val="D0D5DD"/>
+            </a:solidFill>
+          </a:ln>
         </p:spPr>
         <p:txBody>
           <a:bodyPr/>
@@ -3986,7 +3994,7 @@
             <a:r>
               <a:rPr lang="en-US" sz="1045" dirty="0">
                 <a:solidFill>
-                  <a:srgbClr val="C9D3F5"/>
+                  <a:srgbClr val="1F2429"/>
                 </a:solidFill>
                 <a:latin typeface="Courier New" pitchFamily="34" charset="0"/>
                 <a:ea typeface="Courier New" pitchFamily="34" charset="-122"/>
@@ -4006,7 +4014,7 @@
             <a:r>
               <a:rPr lang="en-US" sz="1045" dirty="0">
                 <a:solidFill>
-                  <a:srgbClr val="C9D3F5"/>
+                  <a:srgbClr val="1F2429"/>
                 </a:solidFill>
                 <a:latin typeface="Courier New" pitchFamily="34" charset="0"/>
                 <a:ea typeface="Courier New" pitchFamily="34" charset="-122"/>
@@ -4035,7 +4043,7 @@
             <a:r>
               <a:rPr lang="en-US" sz="1045" dirty="0">
                 <a:solidFill>
-                  <a:srgbClr val="C9D3F5"/>
+                  <a:srgbClr val="1F2429"/>
                 </a:solidFill>
                 <a:latin typeface="Courier New" pitchFamily="34" charset="0"/>
                 <a:ea typeface="Courier New" pitchFamily="34" charset="-122"/>
@@ -4055,7 +4063,7 @@
             <a:r>
               <a:rPr lang="en-US" sz="1045" dirty="0">
                 <a:solidFill>
-                  <a:srgbClr val="C9D3F5"/>
+                  <a:srgbClr val="1F2429"/>
                 </a:solidFill>
                 <a:latin typeface="Courier New" pitchFamily="34" charset="0"/>
                 <a:ea typeface="Courier New" pitchFamily="34" charset="-122"/>
@@ -4075,7 +4083,7 @@
             <a:r>
               <a:rPr lang="en-US" sz="1045" dirty="0">
                 <a:solidFill>
-                  <a:srgbClr val="C9D3F5"/>
+                  <a:srgbClr val="1F2429"/>
                 </a:solidFill>
                 <a:latin typeface="Courier New" pitchFamily="34" charset="0"/>
                 <a:ea typeface="Courier New" pitchFamily="34" charset="-122"/>
@@ -4095,7 +4103,7 @@
             <a:r>
               <a:rPr lang="en-US" sz="1045" dirty="0">
                 <a:solidFill>
-                  <a:srgbClr val="C9D3F5"/>
+                  <a:srgbClr val="1F2429"/>
                 </a:solidFill>
                 <a:latin typeface="Courier New" pitchFamily="34" charset="0"/>
                 <a:ea typeface="Courier New" pitchFamily="34" charset="-122"/>
@@ -4124,7 +4132,7 @@
             <a:r>
               <a:rPr lang="en-US" sz="1045" dirty="0">
                 <a:solidFill>
-                  <a:srgbClr val="C9D3F5"/>
+                  <a:srgbClr val="1F2429"/>
                 </a:solidFill>
                 <a:latin typeface="Courier New" pitchFamily="34" charset="0"/>
                 <a:ea typeface="Courier New" pitchFamily="34" charset="-122"/>
@@ -4144,7 +4152,7 @@
             <a:r>
               <a:rPr lang="en-US" sz="1045" dirty="0">
                 <a:solidFill>
-                  <a:srgbClr val="C9D3F5"/>
+                  <a:srgbClr val="1F2429"/>
                 </a:solidFill>
                 <a:latin typeface="Courier New" pitchFamily="34" charset="0"/>
                 <a:ea typeface="Courier New" pitchFamily="34" charset="-122"/>
@@ -4164,7 +4172,7 @@
             <a:r>
               <a:rPr lang="en-US" sz="1045" dirty="0">
                 <a:solidFill>
-                  <a:srgbClr val="C9D3F5"/>
+                  <a:srgbClr val="1F2429"/>
                 </a:solidFill>
                 <a:latin typeface="Courier New" pitchFamily="34" charset="0"/>
                 <a:ea typeface="Courier New" pitchFamily="34" charset="-122"/>
@@ -4193,7 +4201,7 @@
             <a:r>
               <a:rPr lang="en-US" sz="1045" dirty="0">
                 <a:solidFill>
-                  <a:srgbClr val="C9D3F5"/>
+                  <a:srgbClr val="1F2429"/>
                 </a:solidFill>
                 <a:latin typeface="Courier New" pitchFamily="34" charset="0"/>
                 <a:ea typeface="Courier New" pitchFamily="34" charset="-122"/>
@@ -4213,7 +4221,7 @@
             <a:r>
               <a:rPr lang="en-US" sz="1045" dirty="0">
                 <a:solidFill>
-                  <a:srgbClr val="C9D3F5"/>
+                  <a:srgbClr val="1F2429"/>
                 </a:solidFill>
                 <a:latin typeface="Courier New" pitchFamily="34" charset="0"/>
                 <a:ea typeface="Courier New" pitchFamily="34" charset="-122"/>
@@ -4233,7 +4241,7 @@
             <a:r>
               <a:rPr lang="en-US" sz="1045" dirty="0">
                 <a:solidFill>
-                  <a:srgbClr val="C9D3F5"/>
+                  <a:srgbClr val="1F2429"/>
                 </a:solidFill>
                 <a:latin typeface="Courier New" pitchFamily="34" charset="0"/>
                 <a:ea typeface="Courier New" pitchFamily="34" charset="-122"/>
@@ -4262,7 +4270,7 @@
             <a:r>
               <a:rPr lang="en-US" sz="1045" dirty="0">
                 <a:solidFill>
-                  <a:srgbClr val="C9D3F5"/>
+                  <a:srgbClr val="1F2429"/>
                 </a:solidFill>
                 <a:latin typeface="Courier New" pitchFamily="34" charset="0"/>
                 <a:ea typeface="Courier New" pitchFamily="34" charset="-122"/>
@@ -4444,9 +4452,13 @@
             </a:avLst>
           </a:prstGeom>
           <a:solidFill>
-            <a:srgbClr val="1E1E4C"/>
+            <a:srgbClr val="F7F8F9"/>
           </a:solidFill>
-          <a:ln/>
+          <a:ln w="9525">
+            <a:solidFill>
+              <a:srgbClr val="D0D5DD"/>
+            </a:solidFill>
+          </a:ln>
         </p:spPr>
         <p:txBody>
           <a:bodyPr/>
@@ -4483,7 +4495,7 @@
             <a:r>
               <a:rPr lang="en-US" sz="1400" dirty="0">
                 <a:solidFill>
-                  <a:srgbClr val="C9D3F5"/>
+                  <a:srgbClr val="1F2429"/>
                 </a:solidFill>
                 <a:latin typeface="Courier New" pitchFamily="34" charset="0"/>
                 <a:ea typeface="Courier New" pitchFamily="34" charset="-122"/>
@@ -4503,7 +4515,7 @@
             <a:r>
               <a:rPr lang="en-US" sz="1400" dirty="0">
                 <a:solidFill>
-                  <a:srgbClr val="C9D3F5"/>
+                  <a:srgbClr val="1F2429"/>
                 </a:solidFill>
                 <a:latin typeface="Courier New" pitchFamily="34" charset="0"/>
                 <a:ea typeface="Courier New" pitchFamily="34" charset="-122"/>
@@ -4523,7 +4535,7 @@
             <a:r>
               <a:rPr lang="en-US" sz="1400" dirty="0">
                 <a:solidFill>
-                  <a:srgbClr val="C9D3F5"/>
+                  <a:srgbClr val="1F2429"/>
                 </a:solidFill>
                 <a:latin typeface="Courier New" pitchFamily="34" charset="0"/>
                 <a:ea typeface="Courier New" pitchFamily="34" charset="-122"/>
@@ -5203,9 +5215,13 @@
             </a:avLst>
           </a:prstGeom>
           <a:solidFill>
-            <a:srgbClr val="1E1E4C"/>
+            <a:srgbClr val="F7F8F9"/>
           </a:solidFill>
-          <a:ln/>
+          <a:ln w="9525">
+            <a:solidFill>
+              <a:srgbClr val="D0D5DD"/>
+            </a:solidFill>
+          </a:ln>
         </p:spPr>
         <p:txBody>
           <a:bodyPr/>
@@ -5242,7 +5258,7 @@
             <a:r>
               <a:rPr lang="en-US" sz="1400" dirty="0">
                 <a:solidFill>
-                  <a:srgbClr val="C9D3F5"/>
+                  <a:srgbClr val="1F2429"/>
                 </a:solidFill>
                 <a:latin typeface="Courier New" pitchFamily="34" charset="0"/>
                 <a:ea typeface="Courier New" pitchFamily="34" charset="-122"/>
@@ -5262,7 +5278,7 @@
             <a:r>
               <a:rPr lang="en-US" sz="1400" dirty="0">
                 <a:solidFill>
-                  <a:srgbClr val="C9D3F5"/>
+                  <a:srgbClr val="1F2429"/>
                 </a:solidFill>
                 <a:latin typeface="Courier New" pitchFamily="34" charset="0"/>
                 <a:ea typeface="Courier New" pitchFamily="34" charset="-122"/>
@@ -5282,7 +5298,7 @@
             <a:r>
               <a:rPr lang="en-US" sz="1400" dirty="0">
                 <a:solidFill>
-                  <a:srgbClr val="C9D3F5"/>
+                  <a:srgbClr val="1F2429"/>
                 </a:solidFill>
                 <a:latin typeface="Courier New" pitchFamily="34" charset="0"/>
                 <a:ea typeface="Courier New" pitchFamily="34" charset="-122"/>
@@ -5302,7 +5318,7 @@
             <a:r>
               <a:rPr lang="en-US" sz="1400" dirty="0">
                 <a:solidFill>
-                  <a:srgbClr val="C9D3F5"/>
+                  <a:srgbClr val="1F2429"/>
                 </a:solidFill>
                 <a:latin typeface="Courier New" pitchFamily="34" charset="0"/>
                 <a:ea typeface="Courier New" pitchFamily="34" charset="-122"/>
@@ -5322,7 +5338,7 @@
             <a:r>
               <a:rPr lang="en-US" sz="1400" dirty="0">
                 <a:solidFill>
-                  <a:srgbClr val="C9D3F5"/>
+                  <a:srgbClr val="1F2429"/>
                 </a:solidFill>
                 <a:latin typeface="Courier New" pitchFamily="34" charset="0"/>
                 <a:ea typeface="Courier New" pitchFamily="34" charset="-122"/>
@@ -5342,7 +5358,7 @@
             <a:r>
               <a:rPr lang="en-US" sz="1400" dirty="0">
                 <a:solidFill>
-                  <a:srgbClr val="C9D3F5"/>
+                  <a:srgbClr val="1F2429"/>
                 </a:solidFill>
                 <a:latin typeface="Courier New" pitchFamily="34" charset="0"/>
                 <a:ea typeface="Courier New" pitchFamily="34" charset="-122"/>
@@ -5563,9 +5579,13 @@
             </a:avLst>
           </a:prstGeom>
           <a:solidFill>
-            <a:srgbClr val="1E1E4C"/>
+            <a:srgbClr val="F7F8F9"/>
           </a:solidFill>
-          <a:ln/>
+          <a:ln w="9525">
+            <a:solidFill>
+              <a:srgbClr val="D0D5DD"/>
+            </a:solidFill>
+          </a:ln>
         </p:spPr>
         <p:txBody>
           <a:bodyPr/>
@@ -5602,7 +5622,7 @@
             <a:r>
               <a:rPr lang="en-US" sz="1000" dirty="0">
                 <a:solidFill>
-                  <a:srgbClr val="C9D3F5"/>
+                  <a:srgbClr val="1F2429"/>
                 </a:solidFill>
                 <a:latin typeface="Courier New" pitchFamily="34" charset="0"/>
                 <a:ea typeface="Courier New" pitchFamily="34" charset="-122"/>
@@ -5622,7 +5642,7 @@
             <a:r>
               <a:rPr lang="en-US" sz="1000" dirty="0">
                 <a:solidFill>
-                  <a:srgbClr val="C9D3F5"/>
+                  <a:srgbClr val="1F2429"/>
                 </a:solidFill>
                 <a:latin typeface="Courier New" pitchFamily="34" charset="0"/>
                 <a:ea typeface="Courier New" pitchFamily="34" charset="-122"/>
@@ -5642,7 +5662,7 @@
             <a:r>
               <a:rPr lang="en-US" sz="1000" dirty="0">
                 <a:solidFill>
-                  <a:srgbClr val="C9D3F5"/>
+                  <a:srgbClr val="1F2429"/>
                 </a:solidFill>
                 <a:latin typeface="Courier New" pitchFamily="34" charset="0"/>
                 <a:ea typeface="Courier New" pitchFamily="34" charset="-122"/>
@@ -5662,7 +5682,7 @@
             <a:r>
               <a:rPr lang="en-US" sz="1000" dirty="0">
                 <a:solidFill>
-                  <a:srgbClr val="C9D3F5"/>
+                  <a:srgbClr val="1F2429"/>
                 </a:solidFill>
                 <a:latin typeface="Courier New" pitchFamily="34" charset="0"/>
                 <a:ea typeface="Courier New" pitchFamily="34" charset="-122"/>
@@ -5682,7 +5702,7 @@
             <a:r>
               <a:rPr lang="en-US" sz="1000" dirty="0">
                 <a:solidFill>
-                  <a:srgbClr val="C9D3F5"/>
+                  <a:srgbClr val="1F2429"/>
                 </a:solidFill>
                 <a:latin typeface="Courier New" pitchFamily="34" charset="0"/>
                 <a:ea typeface="Courier New" pitchFamily="34" charset="-122"/>
@@ -5702,7 +5722,7 @@
             <a:r>
               <a:rPr lang="en-US" sz="1000" dirty="0">
                 <a:solidFill>
-                  <a:srgbClr val="C9D3F5"/>
+                  <a:srgbClr val="1F2429"/>
                 </a:solidFill>
                 <a:latin typeface="Courier New" pitchFamily="34" charset="0"/>
                 <a:ea typeface="Courier New" pitchFamily="34" charset="-122"/>
@@ -5722,7 +5742,7 @@
             <a:r>
               <a:rPr lang="en-US" sz="1000" dirty="0">
                 <a:solidFill>
-                  <a:srgbClr val="C9D3F5"/>
+                  <a:srgbClr val="1F2429"/>
                 </a:solidFill>
                 <a:latin typeface="Courier New" pitchFamily="34" charset="0"/>
                 <a:ea typeface="Courier New" pitchFamily="34" charset="-122"/>
@@ -5742,7 +5762,7 @@
             <a:r>
               <a:rPr lang="en-US" sz="1000" dirty="0">
                 <a:solidFill>
-                  <a:srgbClr val="C9D3F5"/>
+                  <a:srgbClr val="1F2429"/>
                 </a:solidFill>
                 <a:latin typeface="Courier New" pitchFamily="34" charset="0"/>
                 <a:ea typeface="Courier New" pitchFamily="34" charset="-122"/>
@@ -5771,7 +5791,7 @@
             <a:r>
               <a:rPr lang="en-US" sz="1000" dirty="0">
                 <a:solidFill>
-                  <a:srgbClr val="C9D3F5"/>
+                  <a:srgbClr val="1F2429"/>
                 </a:solidFill>
                 <a:latin typeface="Courier New" pitchFamily="34" charset="0"/>
                 <a:ea typeface="Courier New" pitchFamily="34" charset="-122"/>
@@ -5800,7 +5820,7 @@
             <a:r>
               <a:rPr lang="en-US" sz="1000" dirty="0">
                 <a:solidFill>
-                  <a:srgbClr val="C9D3F5"/>
+                  <a:srgbClr val="1F2429"/>
                 </a:solidFill>
                 <a:latin typeface="Courier New" pitchFamily="34" charset="0"/>
                 <a:ea typeface="Courier New" pitchFamily="34" charset="-122"/>
@@ -5820,7 +5840,7 @@
             <a:r>
               <a:rPr lang="en-US" sz="1000" dirty="0">
                 <a:solidFill>
-                  <a:srgbClr val="C9D3F5"/>
+                  <a:srgbClr val="1F2429"/>
                 </a:solidFill>
                 <a:latin typeface="Courier New" pitchFamily="34" charset="0"/>
                 <a:ea typeface="Courier New" pitchFamily="34" charset="-122"/>
@@ -5840,7 +5860,7 @@
             <a:r>
               <a:rPr lang="en-US" sz="1000" dirty="0">
                 <a:solidFill>
-                  <a:srgbClr val="C9D3F5"/>
+                  <a:srgbClr val="1F2429"/>
                 </a:solidFill>
                 <a:latin typeface="Courier New" pitchFamily="34" charset="0"/>
                 <a:ea typeface="Courier New" pitchFamily="34" charset="-122"/>
@@ -5860,7 +5880,7 @@
             <a:r>
               <a:rPr lang="en-US" sz="1000" dirty="0">
                 <a:solidFill>
-                  <a:srgbClr val="C9D3F5"/>
+                  <a:srgbClr val="1F2429"/>
                 </a:solidFill>
                 <a:latin typeface="Courier New" pitchFamily="34" charset="0"/>
                 <a:ea typeface="Courier New" pitchFamily="34" charset="-122"/>
@@ -6073,7 +6093,7 @@
         <p:spPr>
           <a:xfrm>
             <a:off x="640080" y="1965960"/>
-            <a:ext cx="10911535" cy="1737360"/>
+            <a:ext cx="10911535" cy="3657600"/>
           </a:xfrm>
           <a:prstGeom prst="roundRect">
             <a:avLst>
@@ -6104,7 +6124,7 @@
         <p:spPr>
           <a:xfrm>
             <a:off x="868680" y="2103120"/>
-            <a:ext cx="10454335" cy="274320"/>
+            <a:ext cx="10454335" cy="400000"/>
           </a:xfrm>
           <a:prstGeom prst="rect">
             <a:avLst/>
@@ -6120,7 +6140,7 @@
               <a:buNone/>
             </a:pPr>
             <a:r>
-              <a:rPr lang="en-US" sz="1000" b="1" spc="200" kern="0" dirty="0">
+              <a:rPr lang="en-US" sz="1800" b="1" spc="200" kern="0" dirty="0">
                 <a:solidFill>
                   <a:srgbClr val="33459E"/>
                 </a:solidFill>
@@ -6130,7 +6150,7 @@
               </a:rPr>
               <a:t>NOTE</a:t>
             </a:r>
-            <a:endParaRPr lang="en-US" sz="1000" dirty="0"/>
+            <a:endParaRPr lang="en-US" sz="1800" dirty="0"/>
           </a:p>
         </p:txBody>
       </p:sp>
@@ -6142,24 +6162,24 @@
         </p:nvSpPr>
         <p:spPr>
           <a:xfrm>
-            <a:off x="868680" y="2404872"/>
-            <a:ext cx="10454335" cy="1143000"/>
-          </a:xfrm>
-          <a:prstGeom prst="rect">
-            <a:avLst/>
-          </a:prstGeom>
-          <a:noFill/>
-          <a:ln/>
-        </p:spPr>
-        <p:txBody>
-          <a:bodyPr wrap="square" lIns="0" tIns="0" rIns="0" bIns="0" rtlCol="0" anchor="t"/>
-          <a:lstStyle/>
-          <a:p>
-            <a:pPr indent="0" marL="0">
-              <a:buNone/>
-            </a:pPr>
-            <a:r>
-              <a:rPr lang="en-US" sz="1250" dirty="0">
+            <a:off x="868680" y="2795960"/>
+            <a:ext cx="10454335" cy="2500000"/>
+          </a:xfrm>
+          <a:prstGeom prst="rect">
+            <a:avLst/>
+          </a:prstGeom>
+          <a:noFill/>
+          <a:ln/>
+        </p:spPr>
+        <p:txBody>
+          <a:bodyPr wrap="square" lIns="0" tIns="0" rIns="0" bIns="0" rtlCol="0" anchor="ctr"/>
+          <a:lstStyle/>
+          <a:p>
+            <a:pPr indent="0" marL="0">
+              <a:buNone/>
+            </a:pPr>
+            <a:r>
+              <a:rPr lang="en-US" sz="2800" dirty="0">
                 <a:solidFill>
                   <a:srgbClr val="26262F"/>
                 </a:solidFill>
@@ -6169,7 +6189,7 @@
               </a:rPr>
               <a:t>You can have multiple error-handling middleware functions — one that logs and calls next(err) again, and a final one that sends the response. The same chain idea applies to errors too.</a:t>
             </a:r>
-            <a:endParaRPr lang="en-US" sz="1250" dirty="0"/>
+            <a:endParaRPr lang="en-US" sz="2800" dirty="0"/>
           </a:p>
         </p:txBody>
       </p:sp>
@@ -6802,9 +6822,13 @@
             </a:avLst>
           </a:prstGeom>
           <a:solidFill>
-            <a:srgbClr val="1E1E4C"/>
+            <a:srgbClr val="F7F8F9"/>
           </a:solidFill>
-          <a:ln/>
+          <a:ln w="9525">
+            <a:solidFill>
+              <a:srgbClr val="D0D5DD"/>
+            </a:solidFill>
+          </a:ln>
         </p:spPr>
         <p:txBody>
           <a:bodyPr/>
@@ -6841,7 +6865,7 @@
             <a:r>
               <a:rPr lang="en-US" sz="1400" dirty="0">
                 <a:solidFill>
-                  <a:srgbClr val="C9D3F5"/>
+                  <a:srgbClr val="1F2429"/>
                 </a:solidFill>
                 <a:latin typeface="Courier New" pitchFamily="34" charset="0"/>
                 <a:ea typeface="Courier New" pitchFamily="34" charset="-122"/>
@@ -6870,7 +6894,7 @@
             <a:r>
               <a:rPr lang="en-US" sz="1400" dirty="0">
                 <a:solidFill>
-                  <a:srgbClr val="C9D3F5"/>
+                  <a:srgbClr val="1F2429"/>
                 </a:solidFill>
                 <a:latin typeface="Courier New" pitchFamily="34" charset="0"/>
                 <a:ea typeface="Courier New" pitchFamily="34" charset="-122"/>
@@ -6890,7 +6914,7 @@
             <a:r>
               <a:rPr lang="en-US" sz="1400" dirty="0">
                 <a:solidFill>
-                  <a:srgbClr val="C9D3F5"/>
+                  <a:srgbClr val="1F2429"/>
                 </a:solidFill>
                 <a:latin typeface="Courier New" pitchFamily="34" charset="0"/>
                 <a:ea typeface="Courier New" pitchFamily="34" charset="-122"/>
@@ -6910,7 +6934,7 @@
             <a:r>
               <a:rPr lang="en-US" sz="1400" dirty="0">
                 <a:solidFill>
-                  <a:srgbClr val="C9D3F5"/>
+                  <a:srgbClr val="1F2429"/>
                 </a:solidFill>
                 <a:latin typeface="Courier New" pitchFamily="34" charset="0"/>
                 <a:ea typeface="Courier New" pitchFamily="34" charset="-122"/>
@@ -6930,7 +6954,7 @@
             <a:r>
               <a:rPr lang="en-US" sz="1400" dirty="0">
                 <a:solidFill>
-                  <a:srgbClr val="C9D3F5"/>
+                  <a:srgbClr val="1F2429"/>
                 </a:solidFill>
                 <a:latin typeface="Courier New" pitchFamily="34" charset="0"/>
                 <a:ea typeface="Courier New" pitchFamily="34" charset="-122"/>
@@ -7151,9 +7175,13 @@
             </a:avLst>
           </a:prstGeom>
           <a:solidFill>
-            <a:srgbClr val="1E1E4C"/>
+            <a:srgbClr val="F7F8F9"/>
           </a:solidFill>
-          <a:ln/>
+          <a:ln w="9525">
+            <a:solidFill>
+              <a:srgbClr val="D0D5DD"/>
+            </a:solidFill>
+          </a:ln>
         </p:spPr>
         <p:txBody>
           <a:bodyPr/>
@@ -7190,7 +7218,7 @@
             <a:r>
               <a:rPr lang="en-US" sz="1400" dirty="0">
                 <a:solidFill>
-                  <a:srgbClr val="C9D3F5"/>
+                  <a:srgbClr val="1F2429"/>
                 </a:solidFill>
                 <a:latin typeface="Courier New" pitchFamily="34" charset="0"/>
                 <a:ea typeface="Courier New" pitchFamily="34" charset="-122"/>
@@ -7219,7 +7247,7 @@
             <a:r>
               <a:rPr lang="en-US" sz="1400" dirty="0">
                 <a:solidFill>
-                  <a:srgbClr val="C9D3F5"/>
+                  <a:srgbClr val="1F2429"/>
                 </a:solidFill>
                 <a:latin typeface="Courier New" pitchFamily="34" charset="0"/>
                 <a:ea typeface="Courier New" pitchFamily="34" charset="-122"/>
@@ -7239,7 +7267,7 @@
             <a:r>
               <a:rPr lang="en-US" sz="1400" dirty="0">
                 <a:solidFill>
-                  <a:srgbClr val="C9D3F5"/>
+                  <a:srgbClr val="1F2429"/>
                 </a:solidFill>
                 <a:latin typeface="Courier New" pitchFamily="34" charset="0"/>
                 <a:ea typeface="Courier New" pitchFamily="34" charset="-122"/>
@@ -8628,9 +8656,13 @@
             </a:avLst>
           </a:prstGeom>
           <a:solidFill>
-            <a:srgbClr val="1E1E4C"/>
+            <a:srgbClr val="F7F8F9"/>
           </a:solidFill>
-          <a:ln/>
+          <a:ln w="9525">
+            <a:solidFill>
+              <a:srgbClr val="D0D5DD"/>
+            </a:solidFill>
+          </a:ln>
         </p:spPr>
         <p:txBody>
           <a:bodyPr/>
@@ -8667,7 +8699,7 @@
             <a:r>
               <a:rPr lang="en-US" sz="1400" dirty="0">
                 <a:solidFill>
-                  <a:srgbClr val="C9D3F5"/>
+                  <a:srgbClr val="1F2429"/>
                 </a:solidFill>
                 <a:latin typeface="Courier New" pitchFamily="34" charset="0"/>
                 <a:ea typeface="Courier New" pitchFamily="34" charset="-122"/>
@@ -8696,7 +8728,7 @@
             <a:r>
               <a:rPr lang="en-US" sz="1400" dirty="0">
                 <a:solidFill>
-                  <a:srgbClr val="C9D3F5"/>
+                  <a:srgbClr val="1F2429"/>
                 </a:solidFill>
                 <a:latin typeface="Courier New" pitchFamily="34" charset="0"/>
                 <a:ea typeface="Courier New" pitchFamily="34" charset="-122"/>
@@ -8716,7 +8748,7 @@
             <a:r>
               <a:rPr lang="en-US" sz="1400" dirty="0">
                 <a:solidFill>
-                  <a:srgbClr val="C9D3F5"/>
+                  <a:srgbClr val="1F2429"/>
                 </a:solidFill>
                 <a:latin typeface="Courier New" pitchFamily="34" charset="0"/>
                 <a:ea typeface="Courier New" pitchFamily="34" charset="-122"/>
@@ -8736,7 +8768,7 @@
             <a:r>
               <a:rPr lang="en-US" sz="1400" dirty="0">
                 <a:solidFill>
-                  <a:srgbClr val="C9D3F5"/>
+                  <a:srgbClr val="1F2429"/>
                 </a:solidFill>
                 <a:latin typeface="Courier New" pitchFamily="34" charset="0"/>
                 <a:ea typeface="Courier New" pitchFamily="34" charset="-122"/>
@@ -8918,9 +8950,13 @@
             </a:avLst>
           </a:prstGeom>
           <a:solidFill>
-            <a:srgbClr val="1E1E4C"/>
+            <a:srgbClr val="F7F8F9"/>
           </a:solidFill>
-          <a:ln/>
+          <a:ln w="9525">
+            <a:solidFill>
+              <a:srgbClr val="D0D5DD"/>
+            </a:solidFill>
+          </a:ln>
         </p:spPr>
         <p:txBody>
           <a:bodyPr/>
@@ -8957,7 +8993,7 @@
             <a:r>
               <a:rPr lang="en-US" sz="1400" dirty="0">
                 <a:solidFill>
-                  <a:srgbClr val="C9D3F5"/>
+                  <a:srgbClr val="1F2429"/>
                 </a:solidFill>
                 <a:latin typeface="Courier New" pitchFamily="34" charset="0"/>
                 <a:ea typeface="Courier New" pitchFamily="34" charset="-122"/>
@@ -8986,7 +9022,7 @@
             <a:r>
               <a:rPr lang="en-US" sz="1400" dirty="0">
                 <a:solidFill>
-                  <a:srgbClr val="C9D3F5"/>
+                  <a:srgbClr val="1F2429"/>
                 </a:solidFill>
                 <a:latin typeface="Courier New" pitchFamily="34" charset="0"/>
                 <a:ea typeface="Courier New" pitchFamily="34" charset="-122"/>
@@ -9006,7 +9042,7 @@
             <a:r>
               <a:rPr lang="en-US" sz="1400" dirty="0">
                 <a:solidFill>
-                  <a:srgbClr val="C9D3F5"/>
+                  <a:srgbClr val="1F2429"/>
                 </a:solidFill>
                 <a:latin typeface="Courier New" pitchFamily="34" charset="0"/>
                 <a:ea typeface="Courier New" pitchFamily="34" charset="-122"/>
@@ -9035,7 +9071,7 @@
             <a:r>
               <a:rPr lang="en-US" sz="1400" dirty="0">
                 <a:solidFill>
-                  <a:srgbClr val="C9D3F5"/>
+                  <a:srgbClr val="1F2429"/>
                 </a:solidFill>
                 <a:latin typeface="Courier New" pitchFamily="34" charset="0"/>
                 <a:ea typeface="Courier New" pitchFamily="34" charset="-122"/>
@@ -9055,7 +9091,7 @@
             <a:r>
               <a:rPr lang="en-US" sz="1400" dirty="0">
                 <a:solidFill>
-                  <a:srgbClr val="C9D3F5"/>
+                  <a:srgbClr val="1F2429"/>
                 </a:solidFill>
                 <a:latin typeface="Courier New" pitchFamily="34" charset="0"/>
                 <a:ea typeface="Courier New" pitchFamily="34" charset="-122"/>
@@ -9229,7 +9265,7 @@
         <p:spPr>
           <a:xfrm>
             <a:off x="640080" y="1965960"/>
-            <a:ext cx="10911535" cy="1828800"/>
+            <a:ext cx="10911535" cy="3657600"/>
           </a:xfrm>
           <a:prstGeom prst="roundRect">
             <a:avLst>
@@ -9260,7 +9296,7 @@
         <p:spPr>
           <a:xfrm>
             <a:off x="868680" y="2103120"/>
-            <a:ext cx="10454335" cy="274320"/>
+            <a:ext cx="10454335" cy="400000"/>
           </a:xfrm>
           <a:prstGeom prst="rect">
             <a:avLst/>
@@ -9276,7 +9312,7 @@
               <a:buNone/>
             </a:pPr>
             <a:r>
-              <a:rPr lang="en-US" sz="1000" b="1" spc="200" kern="0" dirty="0">
+              <a:rPr lang="en-US" sz="1800" b="1" spc="200" kern="0" dirty="0">
                 <a:solidFill>
                   <a:srgbClr val="8A3A12"/>
                 </a:solidFill>
@@ -9286,7 +9322,7 @@
               </a:rPr>
               <a:t>WARNING</a:t>
             </a:r>
-            <a:endParaRPr lang="en-US" sz="1000" dirty="0"/>
+            <a:endParaRPr lang="en-US" sz="1800" dirty="0"/>
           </a:p>
         </p:txBody>
       </p:sp>
@@ -9298,24 +9334,24 @@
         </p:nvSpPr>
         <p:spPr>
           <a:xfrm>
-            <a:off x="868680" y="2404872"/>
-            <a:ext cx="10454335" cy="1234440"/>
-          </a:xfrm>
-          <a:prstGeom prst="rect">
-            <a:avLst/>
-          </a:prstGeom>
-          <a:noFill/>
-          <a:ln/>
-        </p:spPr>
-        <p:txBody>
-          <a:bodyPr wrap="square" lIns="0" tIns="0" rIns="0" bIns="0" rtlCol="0" anchor="t"/>
-          <a:lstStyle/>
-          <a:p>
-            <a:pPr indent="0" marL="0">
-              <a:buNone/>
-            </a:pPr>
-            <a:r>
-              <a:rPr lang="en-US" sz="1250" dirty="0">
+            <a:off x="868680" y="2795960"/>
+            <a:ext cx="10454335" cy="2500000"/>
+          </a:xfrm>
+          <a:prstGeom prst="rect">
+            <a:avLst/>
+          </a:prstGeom>
+          <a:noFill/>
+          <a:ln/>
+        </p:spPr>
+        <p:txBody>
+          <a:bodyPr wrap="square" lIns="0" tIns="0" rIns="0" bIns="0" rtlCol="0" anchor="ctr"/>
+          <a:lstStyle/>
+          <a:p>
+            <a:pPr indent="0" marL="0">
+              <a:buNone/>
+            </a:pPr>
+            <a:r>
+              <a:rPr lang="en-US" sz="2800" dirty="0">
                 <a:solidFill>
                   <a:srgbClr val="26262F"/>
                 </a:solidFill>
@@ -9325,7 +9361,7 @@
               </a:rPr>
               <a:t>cors() with no options allows ANY website to call your API from the browser. That's convenient during development but should usually be locked down to specific origins before you deploy to production.</a:t>
             </a:r>
-            <a:endParaRPr lang="en-US" sz="1250" dirty="0"/>
+            <a:endParaRPr lang="en-US" sz="2800" dirty="0"/>
           </a:p>
         </p:txBody>
       </p:sp>
@@ -9499,9 +9535,13 @@
             </a:avLst>
           </a:prstGeom>
           <a:solidFill>
-            <a:srgbClr val="1E1E4C"/>
+            <a:srgbClr val="F7F8F9"/>
           </a:solidFill>
-          <a:ln/>
+          <a:ln w="9525">
+            <a:solidFill>
+              <a:srgbClr val="D0D5DD"/>
+            </a:solidFill>
+          </a:ln>
         </p:spPr>
         <p:txBody>
           <a:bodyPr/>
@@ -9538,7 +9578,7 @@
             <a:r>
               <a:rPr lang="en-US" sz="1200" dirty="0">
                 <a:solidFill>
-                  <a:srgbClr val="C9D3F5"/>
+                  <a:srgbClr val="1F2429"/>
                 </a:solidFill>
                 <a:latin typeface="Courier New" pitchFamily="34" charset="0"/>
                 <a:ea typeface="Courier New" pitchFamily="34" charset="-122"/>
@@ -9558,7 +9598,7 @@
             <a:r>
               <a:rPr lang="en-US" sz="1200" dirty="0">
                 <a:solidFill>
-                  <a:srgbClr val="C9D3F5"/>
+                  <a:srgbClr val="1F2429"/>
                 </a:solidFill>
                 <a:latin typeface="Courier New" pitchFamily="34" charset="0"/>
                 <a:ea typeface="Courier New" pitchFamily="34" charset="-122"/>
@@ -9578,7 +9618,7 @@
             <a:r>
               <a:rPr lang="en-US" sz="1200" dirty="0">
                 <a:solidFill>
-                  <a:srgbClr val="C9D3F5"/>
+                  <a:srgbClr val="1F2429"/>
                 </a:solidFill>
                 <a:latin typeface="Courier New" pitchFamily="34" charset="0"/>
                 <a:ea typeface="Courier New" pitchFamily="34" charset="-122"/>
@@ -9598,7 +9638,7 @@
             <a:r>
               <a:rPr lang="en-US" sz="1200" dirty="0">
                 <a:solidFill>
-                  <a:srgbClr val="C9D3F5"/>
+                  <a:srgbClr val="1F2429"/>
                 </a:solidFill>
                 <a:latin typeface="Courier New" pitchFamily="34" charset="0"/>
                 <a:ea typeface="Courier New" pitchFamily="34" charset="-122"/>
@@ -9618,7 +9658,7 @@
             <a:r>
               <a:rPr lang="en-US" sz="1200" dirty="0">
                 <a:solidFill>
-                  <a:srgbClr val="C9D3F5"/>
+                  <a:srgbClr val="1F2429"/>
                 </a:solidFill>
                 <a:latin typeface="Courier New" pitchFamily="34" charset="0"/>
                 <a:ea typeface="Courier New" pitchFamily="34" charset="-122"/>
@@ -9638,7 +9678,7 @@
             <a:r>
               <a:rPr lang="en-US" sz="1200" dirty="0">
                 <a:solidFill>
-                  <a:srgbClr val="C9D3F5"/>
+                  <a:srgbClr val="1F2429"/>
                 </a:solidFill>
                 <a:latin typeface="Courier New" pitchFamily="34" charset="0"/>
                 <a:ea typeface="Courier New" pitchFamily="34" charset="-122"/>
@@ -9658,7 +9698,7 @@
             <a:r>
               <a:rPr lang="en-US" sz="1200" dirty="0">
                 <a:solidFill>
-                  <a:srgbClr val="C9D3F5"/>
+                  <a:srgbClr val="1F2429"/>
                 </a:solidFill>
                 <a:latin typeface="Courier New" pitchFamily="34" charset="0"/>
                 <a:ea typeface="Courier New" pitchFamily="34" charset="-122"/>
@@ -9678,7 +9718,7 @@
             <a:r>
               <a:rPr lang="en-US" sz="1200" dirty="0">
                 <a:solidFill>
-                  <a:srgbClr val="C9D3F5"/>
+                  <a:srgbClr val="1F2429"/>
                 </a:solidFill>
                 <a:latin typeface="Courier New" pitchFamily="34" charset="0"/>
                 <a:ea typeface="Courier New" pitchFamily="34" charset="-122"/>
@@ -9707,7 +9747,7 @@
             <a:r>
               <a:rPr lang="en-US" sz="1200" dirty="0">
                 <a:solidFill>
-                  <a:srgbClr val="C9D3F5"/>
+                  <a:srgbClr val="1F2429"/>
                 </a:solidFill>
                 <a:latin typeface="Courier New" pitchFamily="34" charset="0"/>
                 <a:ea typeface="Courier New" pitchFamily="34" charset="-122"/>
@@ -9727,7 +9767,7 @@
             <a:r>
               <a:rPr lang="en-US" sz="1200" dirty="0">
                 <a:solidFill>
-                  <a:srgbClr val="C9D3F5"/>
+                  <a:srgbClr val="1F2429"/>
                 </a:solidFill>
                 <a:latin typeface="Courier New" pitchFamily="34" charset="0"/>
                 <a:ea typeface="Courier New" pitchFamily="34" charset="-122"/>
@@ -9747,7 +9787,7 @@
             <a:r>
               <a:rPr lang="en-US" sz="1200" dirty="0">
                 <a:solidFill>
-                  <a:srgbClr val="C9D3F5"/>
+                  <a:srgbClr val="1F2429"/>
                 </a:solidFill>
                 <a:latin typeface="Courier New" pitchFamily="34" charset="0"/>
                 <a:ea typeface="Courier New" pitchFamily="34" charset="-122"/>
@@ -9968,9 +10008,13 @@
             </a:avLst>
           </a:prstGeom>
           <a:solidFill>
-            <a:srgbClr val="1E1E4C"/>
+            <a:srgbClr val="F7F8F9"/>
           </a:solidFill>
-          <a:ln/>
+          <a:ln w="9525">
+            <a:solidFill>
+              <a:srgbClr val="D0D5DD"/>
+            </a:solidFill>
+          </a:ln>
         </p:spPr>
         <p:txBody>
           <a:bodyPr/>
@@ -10007,7 +10051,7 @@
             <a:r>
               <a:rPr lang="en-US" sz="1000" dirty="0">
                 <a:solidFill>
-                  <a:srgbClr val="C9D3F5"/>
+                  <a:srgbClr val="1F2429"/>
                 </a:solidFill>
                 <a:latin typeface="Courier New" pitchFamily="34" charset="0"/>
                 <a:ea typeface="Courier New" pitchFamily="34" charset="-122"/>
@@ -10027,7 +10071,7 @@
             <a:r>
               <a:rPr lang="en-US" sz="1000" dirty="0">
                 <a:solidFill>
-                  <a:srgbClr val="C9D3F5"/>
+                  <a:srgbClr val="1F2429"/>
                 </a:solidFill>
                 <a:latin typeface="Courier New" pitchFamily="34" charset="0"/>
                 <a:ea typeface="Courier New" pitchFamily="34" charset="-122"/>
@@ -10047,7 +10091,7 @@
             <a:r>
               <a:rPr lang="en-US" sz="1000" dirty="0">
                 <a:solidFill>
-                  <a:srgbClr val="C9D3F5"/>
+                  <a:srgbClr val="1F2429"/>
                 </a:solidFill>
                 <a:latin typeface="Courier New" pitchFamily="34" charset="0"/>
                 <a:ea typeface="Courier New" pitchFamily="34" charset="-122"/>
@@ -10067,7 +10111,7 @@
             <a:r>
               <a:rPr lang="en-US" sz="1000" dirty="0">
                 <a:solidFill>
-                  <a:srgbClr val="C9D3F5"/>
+                  <a:srgbClr val="1F2429"/>
                 </a:solidFill>
                 <a:latin typeface="Courier New" pitchFamily="34" charset="0"/>
                 <a:ea typeface="Courier New" pitchFamily="34" charset="-122"/>
@@ -10096,7 +10140,7 @@
             <a:r>
               <a:rPr lang="en-US" sz="1000" dirty="0">
                 <a:solidFill>
-                  <a:srgbClr val="C9D3F5"/>
+                  <a:srgbClr val="1F2429"/>
                 </a:solidFill>
                 <a:latin typeface="Courier New" pitchFamily="34" charset="0"/>
                 <a:ea typeface="Courier New" pitchFamily="34" charset="-122"/>
@@ -10116,7 +10160,7 @@
             <a:r>
               <a:rPr lang="en-US" sz="1000" dirty="0">
                 <a:solidFill>
-                  <a:srgbClr val="C9D3F5"/>
+                  <a:srgbClr val="1F2429"/>
                 </a:solidFill>
                 <a:latin typeface="Courier New" pitchFamily="34" charset="0"/>
                 <a:ea typeface="Courier New" pitchFamily="34" charset="-122"/>
@@ -10136,7 +10180,7 @@
             <a:r>
               <a:rPr lang="en-US" sz="1000" dirty="0">
                 <a:solidFill>
-                  <a:srgbClr val="C9D3F5"/>
+                  <a:srgbClr val="1F2429"/>
                 </a:solidFill>
                 <a:latin typeface="Courier New" pitchFamily="34" charset="0"/>
                 <a:ea typeface="Courier New" pitchFamily="34" charset="-122"/>
@@ -10156,7 +10200,7 @@
             <a:r>
               <a:rPr lang="en-US" sz="1000" dirty="0">
                 <a:solidFill>
-                  <a:srgbClr val="C9D3F5"/>
+                  <a:srgbClr val="1F2429"/>
                 </a:solidFill>
                 <a:latin typeface="Courier New" pitchFamily="34" charset="0"/>
                 <a:ea typeface="Courier New" pitchFamily="34" charset="-122"/>
@@ -10176,7 +10220,7 @@
             <a:r>
               <a:rPr lang="en-US" sz="1000" dirty="0">
                 <a:solidFill>
-                  <a:srgbClr val="C9D3F5"/>
+                  <a:srgbClr val="1F2429"/>
                 </a:solidFill>
                 <a:latin typeface="Courier New" pitchFamily="34" charset="0"/>
                 <a:ea typeface="Courier New" pitchFamily="34" charset="-122"/>
@@ -10196,7 +10240,7 @@
             <a:r>
               <a:rPr lang="en-US" sz="1000" dirty="0">
                 <a:solidFill>
-                  <a:srgbClr val="C9D3F5"/>
+                  <a:srgbClr val="1F2429"/>
                 </a:solidFill>
                 <a:latin typeface="Courier New" pitchFamily="34" charset="0"/>
                 <a:ea typeface="Courier New" pitchFamily="34" charset="-122"/>
@@ -10225,7 +10269,7 @@
             <a:r>
               <a:rPr lang="en-US" sz="1000" dirty="0">
                 <a:solidFill>
-                  <a:srgbClr val="C9D3F5"/>
+                  <a:srgbClr val="1F2429"/>
                 </a:solidFill>
                 <a:latin typeface="Courier New" pitchFamily="34" charset="0"/>
                 <a:ea typeface="Courier New" pitchFamily="34" charset="-122"/>
@@ -10245,7 +10289,7 @@
             <a:r>
               <a:rPr lang="en-US" sz="1000" dirty="0">
                 <a:solidFill>
-                  <a:srgbClr val="C9D3F5"/>
+                  <a:srgbClr val="1F2429"/>
                 </a:solidFill>
                 <a:latin typeface="Courier New" pitchFamily="34" charset="0"/>
                 <a:ea typeface="Courier New" pitchFamily="34" charset="-122"/>
@@ -10265,7 +10309,7 @@
             <a:r>
               <a:rPr lang="en-US" sz="1000" dirty="0">
                 <a:solidFill>
-                  <a:srgbClr val="C9D3F5"/>
+                  <a:srgbClr val="1F2429"/>
                 </a:solidFill>
                 <a:latin typeface="Courier New" pitchFamily="34" charset="0"/>
                 <a:ea typeface="Courier New" pitchFamily="34" charset="-122"/>
@@ -13216,9 +13260,13 @@
             </a:avLst>
           </a:prstGeom>
           <a:solidFill>
-            <a:srgbClr val="1E1E4C"/>
+            <a:srgbClr val="F7F8F9"/>
           </a:solidFill>
-          <a:ln/>
+          <a:ln w="9525">
+            <a:solidFill>
+              <a:srgbClr val="D0D5DD"/>
+            </a:solidFill>
+          </a:ln>
         </p:spPr>
         <p:txBody>
           <a:bodyPr/>
@@ -13255,7 +13303,7 @@
             <a:r>
               <a:rPr lang="en-US" sz="1400" dirty="0">
                 <a:solidFill>
-                  <a:srgbClr val="C9D3F5"/>
+                  <a:srgbClr val="1F2429"/>
                 </a:solidFill>
                 <a:latin typeface="Courier New" pitchFamily="34" charset="0"/>
                 <a:ea typeface="Courier New" pitchFamily="34" charset="-122"/>
@@ -13275,7 +13323,7 @@
             <a:r>
               <a:rPr lang="en-US" sz="1400" dirty="0">
                 <a:solidFill>
-                  <a:srgbClr val="C9D3F5"/>
+                  <a:srgbClr val="1F2429"/>
                 </a:solidFill>
                 <a:latin typeface="Courier New" pitchFamily="34" charset="0"/>
                 <a:ea typeface="Courier New" pitchFamily="34" charset="-122"/>
@@ -13295,7 +13343,7 @@
             <a:r>
               <a:rPr lang="en-US" sz="1400" dirty="0">
                 <a:solidFill>
-                  <a:srgbClr val="C9D3F5"/>
+                  <a:srgbClr val="1F2429"/>
                 </a:solidFill>
                 <a:latin typeface="Courier New" pitchFamily="34" charset="0"/>
                 <a:ea typeface="Courier New" pitchFamily="34" charset="-122"/>
@@ -13315,7 +13363,7 @@
             <a:r>
               <a:rPr lang="en-US" sz="1400" dirty="0">
                 <a:solidFill>
-                  <a:srgbClr val="C9D3F5"/>
+                  <a:srgbClr val="1F2429"/>
                 </a:solidFill>
                 <a:latin typeface="Courier New" pitchFamily="34" charset="0"/>
                 <a:ea typeface="Courier New" pitchFamily="34" charset="-122"/>
@@ -13335,7 +13383,7 @@
             <a:r>
               <a:rPr lang="en-US" sz="1400" dirty="0">
                 <a:solidFill>
-                  <a:srgbClr val="C9D3F5"/>
+                  <a:srgbClr val="1F2429"/>
                 </a:solidFill>
                 <a:latin typeface="Courier New" pitchFamily="34" charset="0"/>
                 <a:ea typeface="Courier New" pitchFamily="34" charset="-122"/>
@@ -13548,7 +13596,7 @@
         <p:spPr>
           <a:xfrm>
             <a:off x="640080" y="1965960"/>
-            <a:ext cx="10911535" cy="1920240"/>
+            <a:ext cx="10911535" cy="3980000"/>
           </a:xfrm>
           <a:prstGeom prst="roundRect">
             <a:avLst>
@@ -13579,7 +13627,7 @@
         <p:spPr>
           <a:xfrm>
             <a:off x="868680" y="2103120"/>
-            <a:ext cx="10454335" cy="274320"/>
+            <a:ext cx="10454335" cy="400000"/>
           </a:xfrm>
           <a:prstGeom prst="rect">
             <a:avLst/>
@@ -13595,7 +13643,7 @@
               <a:buNone/>
             </a:pPr>
             <a:r>
-              <a:rPr lang="en-US" sz="1000" b="1" spc="200" kern="0" dirty="0">
+              <a:rPr lang="en-US" sz="1800" b="1" spc="200" kern="0" dirty="0">
                 <a:solidFill>
                   <a:srgbClr val="8A3A12"/>
                 </a:solidFill>
@@ -13605,7 +13653,7 @@
               </a:rPr>
               <a:t>WARNING</a:t>
             </a:r>
-            <a:endParaRPr lang="en-US" sz="1000" dirty="0"/>
+            <a:endParaRPr lang="en-US" sz="1800" dirty="0"/>
           </a:p>
         </p:txBody>
       </p:sp>
@@ -13617,24 +13665,24 @@
         </p:nvSpPr>
         <p:spPr>
           <a:xfrm>
-            <a:off x="868680" y="2404872"/>
-            <a:ext cx="10454335" cy="1325880"/>
-          </a:xfrm>
-          <a:prstGeom prst="rect">
-            <a:avLst/>
-          </a:prstGeom>
-          <a:noFill/>
-          <a:ln/>
-        </p:spPr>
-        <p:txBody>
-          <a:bodyPr wrap="square" lIns="0" tIns="0" rIns="0" bIns="0" rtlCol="0" anchor="t"/>
-          <a:lstStyle/>
-          <a:p>
-            <a:pPr indent="0" marL="0">
-              <a:buNone/>
-            </a:pPr>
-            <a:r>
-              <a:rPr lang="en-US" sz="1250" dirty="0">
+            <a:off x="868680" y="2795960"/>
+            <a:ext cx="10454335" cy="3000000"/>
+          </a:xfrm>
+          <a:prstGeom prst="rect">
+            <a:avLst/>
+          </a:prstGeom>
+          <a:noFill/>
+          <a:ln/>
+        </p:spPr>
+        <p:txBody>
+          <a:bodyPr wrap="square" lIns="0" tIns="0" rIns="0" bIns="0" rtlCol="0" anchor="ctr"/>
+          <a:lstStyle/>
+          <a:p>
+            <a:pPr indent="0" marL="0">
+              <a:buNone/>
+            </a:pPr>
+            <a:r>
+              <a:rPr lang="en-US" sz="2800" dirty="0">
                 <a:solidFill>
                   <a:srgbClr val="26262F"/>
                 </a:solidFill>
@@ -13644,7 +13692,7 @@
               </a:rPr>
               <a:t>A middleware function must always either call next() or end the response (with res.send(), res.json(), res.end(), etc.). Doing neither is one of the most common bugs beginners hit with Express — the request just times out.</a:t>
             </a:r>
-            <a:endParaRPr lang="en-US" sz="1250" dirty="0"/>
+            <a:endParaRPr lang="en-US" sz="2800" dirty="0"/>
           </a:p>
         </p:txBody>
       </p:sp>
@@ -13818,9 +13866,13 @@
             </a:avLst>
           </a:prstGeom>
           <a:solidFill>
-            <a:srgbClr val="1E1E4C"/>
+            <a:srgbClr val="F7F8F9"/>
           </a:solidFill>
-          <a:ln/>
+          <a:ln w="9525">
+            <a:solidFill>
+              <a:srgbClr val="D0D5DD"/>
+            </a:solidFill>
+          </a:ln>
         </p:spPr>
         <p:txBody>
           <a:bodyPr/>
@@ -13857,7 +13909,7 @@
             <a:r>
               <a:rPr lang="en-US" sz="1108" dirty="0">
                 <a:solidFill>
-                  <a:srgbClr val="C9D3F5"/>
+                  <a:srgbClr val="1F2429"/>
                 </a:solidFill>
                 <a:latin typeface="Courier New" pitchFamily="34" charset="0"/>
                 <a:ea typeface="Courier New" pitchFamily="34" charset="-122"/>
@@ -13877,7 +13929,7 @@
             <a:r>
               <a:rPr lang="en-US" sz="1108" dirty="0">
                 <a:solidFill>
-                  <a:srgbClr val="C9D3F5"/>
+                  <a:srgbClr val="1F2429"/>
                 </a:solidFill>
                 <a:latin typeface="Courier New" pitchFamily="34" charset="0"/>
                 <a:ea typeface="Courier New" pitchFamily="34" charset="-122"/>
@@ -13906,7 +13958,7 @@
             <a:r>
               <a:rPr lang="en-US" sz="1108" dirty="0">
                 <a:solidFill>
-                  <a:srgbClr val="C9D3F5"/>
+                  <a:srgbClr val="1F2429"/>
                 </a:solidFill>
                 <a:latin typeface="Courier New" pitchFamily="34" charset="0"/>
                 <a:ea typeface="Courier New" pitchFamily="34" charset="-122"/>
@@ -13926,7 +13978,7 @@
             <a:r>
               <a:rPr lang="en-US" sz="1108" dirty="0">
                 <a:solidFill>
-                  <a:srgbClr val="C9D3F5"/>
+                  <a:srgbClr val="1F2429"/>
                 </a:solidFill>
                 <a:latin typeface="Courier New" pitchFamily="34" charset="0"/>
                 <a:ea typeface="Courier New" pitchFamily="34" charset="-122"/>
@@ -13946,7 +13998,7 @@
             <a:r>
               <a:rPr lang="en-US" sz="1108" dirty="0">
                 <a:solidFill>
-                  <a:srgbClr val="C9D3F5"/>
+                  <a:srgbClr val="1F2429"/>
                 </a:solidFill>
                 <a:latin typeface="Courier New" pitchFamily="34" charset="0"/>
                 <a:ea typeface="Courier New" pitchFamily="34" charset="-122"/>
@@ -13966,7 +14018,7 @@
             <a:r>
               <a:rPr lang="en-US" sz="1108" dirty="0">
                 <a:solidFill>
-                  <a:srgbClr val="C9D3F5"/>
+                  <a:srgbClr val="1F2429"/>
                 </a:solidFill>
                 <a:latin typeface="Courier New" pitchFamily="34" charset="0"/>
                 <a:ea typeface="Courier New" pitchFamily="34" charset="-122"/>
@@ -13995,7 +14047,7 @@
             <a:r>
               <a:rPr lang="en-US" sz="1108" dirty="0">
                 <a:solidFill>
-                  <a:srgbClr val="C9D3F5"/>
+                  <a:srgbClr val="1F2429"/>
                 </a:solidFill>
                 <a:latin typeface="Courier New" pitchFamily="34" charset="0"/>
                 <a:ea typeface="Courier New" pitchFamily="34" charset="-122"/>
@@ -14015,7 +14067,7 @@
             <a:r>
               <a:rPr lang="en-US" sz="1108" dirty="0">
                 <a:solidFill>
-                  <a:srgbClr val="C9D3F5"/>
+                  <a:srgbClr val="1F2429"/>
                 </a:solidFill>
                 <a:latin typeface="Courier New" pitchFamily="34" charset="0"/>
                 <a:ea typeface="Courier New" pitchFamily="34" charset="-122"/>
@@ -14035,7 +14087,7 @@
             <a:r>
               <a:rPr lang="en-US" sz="1108" dirty="0">
                 <a:solidFill>
-                  <a:srgbClr val="C9D3F5"/>
+                  <a:srgbClr val="1F2429"/>
                 </a:solidFill>
                 <a:latin typeface="Courier New" pitchFamily="34" charset="0"/>
                 <a:ea typeface="Courier New" pitchFamily="34" charset="-122"/>
@@ -14064,7 +14116,7 @@
             <a:r>
               <a:rPr lang="en-US" sz="1108" dirty="0">
                 <a:solidFill>
-                  <a:srgbClr val="C9D3F5"/>
+                  <a:srgbClr val="1F2429"/>
                 </a:solidFill>
                 <a:latin typeface="Courier New" pitchFamily="34" charset="0"/>
                 <a:ea typeface="Courier New" pitchFamily="34" charset="-122"/>
@@ -14277,7 +14329,7 @@
         <p:spPr>
           <a:xfrm>
             <a:off x="640080" y="1965960"/>
-            <a:ext cx="10911535" cy="1828800"/>
+            <a:ext cx="10911535" cy="3657600"/>
           </a:xfrm>
           <a:prstGeom prst="roundRect">
             <a:avLst>
@@ -14308,7 +14360,7 @@
         <p:spPr>
           <a:xfrm>
             <a:off x="868680" y="2103120"/>
-            <a:ext cx="10454335" cy="274320"/>
+            <a:ext cx="10454335" cy="400000"/>
           </a:xfrm>
           <a:prstGeom prst="rect">
             <a:avLst/>
@@ -14324,7 +14376,7 @@
               <a:buNone/>
             </a:pPr>
             <a:r>
-              <a:rPr lang="en-US" sz="1000" b="1" spc="200" kern="0" dirty="0">
+              <a:rPr lang="en-US" sz="1800" b="1" spc="200" kern="0" dirty="0">
                 <a:solidFill>
                   <a:srgbClr val="1F7A46"/>
                 </a:solidFill>
@@ -14334,7 +14386,7 @@
               </a:rPr>
               <a:t>TIP</a:t>
             </a:r>
-            <a:endParaRPr lang="en-US" sz="1000" dirty="0"/>
+            <a:endParaRPr lang="en-US" sz="1800" dirty="0"/>
           </a:p>
         </p:txBody>
       </p:sp>
@@ -14346,24 +14398,24 @@
         </p:nvSpPr>
         <p:spPr>
           <a:xfrm>
-            <a:off x="868680" y="2404872"/>
-            <a:ext cx="10454335" cy="1234440"/>
-          </a:xfrm>
-          <a:prstGeom prst="rect">
-            <a:avLst/>
-          </a:prstGeom>
-          <a:noFill/>
-          <a:ln/>
-        </p:spPr>
-        <p:txBody>
-          <a:bodyPr wrap="square" lIns="0" tIns="0" rIns="0" bIns="0" rtlCol="0" anchor="t"/>
-          <a:lstStyle/>
-          <a:p>
-            <a:pPr indent="0" marL="0">
-              <a:buNone/>
-            </a:pPr>
-            <a:r>
-              <a:rPr lang="en-US" sz="1250" dirty="0">
+            <a:off x="868680" y="2795960"/>
+            <a:ext cx="10454335" cy="2500000"/>
+          </a:xfrm>
+          <a:prstGeom prst="rect">
+            <a:avLst/>
+          </a:prstGeom>
+          <a:noFill/>
+          <a:ln/>
+        </p:spPr>
+        <p:txBody>
+          <a:bodyPr wrap="square" lIns="0" tIns="0" rIns="0" bIns="0" rtlCol="0" anchor="ctr"/>
+          <a:lstStyle/>
+          <a:p>
+            <a:pPr indent="0" marL="0">
+              <a:buNone/>
+            </a:pPr>
+            <a:r>
+              <a:rPr lang="en-US" sz="2800" dirty="0">
                 <a:solidFill>
                   <a:srgbClr val="26262F"/>
                 </a:solidFill>
@@ -14373,7 +14425,7 @@
               </a:rPr>
               <a:t>Express runs middleware in the exact order you register it. A middleware registered after your routes will never run for requests an earlier route already handled.</a:t>
             </a:r>
-            <a:endParaRPr lang="en-US" sz="1250" dirty="0"/>
+            <a:endParaRPr lang="en-US" sz="2800" dirty="0"/>
           </a:p>
         </p:txBody>
       </p:sp>
